--- a/Design Conceptual Aircraft via SUAVE.pptx
+++ b/Design Conceptual Aircraft via SUAVE.pptx
@@ -327,7 +327,7 @@
             <a:fld id="{D7F4AE8B-A150-4820-BC27-EE42D733F4B8}" type="datetimeFigureOut">
               <a:rPr lang="en-GB" smtClean="0"/>
               <a:pPr/>
-              <a:t>19/04/2026</a:t>
+              <a:t>22/04/2026</a:t>
             </a:fld>
             <a:endParaRPr lang="en-GB"/>
           </a:p>
@@ -499,7 +499,7 @@
             <a:fld id="{45B75E70-762A-4375-AA7C-DE9BB7CC9339}" type="datetimeFigureOut">
               <a:rPr lang="de-DE" smtClean="0"/>
               <a:pPr/>
-              <a:t>19.04.2026</a:t>
+              <a:t>21.04.2026</a:t>
             </a:fld>
             <a:endParaRPr lang="de-DE" dirty="0"/>
           </a:p>
@@ -903,219 +903,6 @@
 </p:notes>
 </file>
 
-<file path=ppt/notesSlides/notesSlide10.xml><?xml version="1.0" encoding="utf-8"?>
-<p:notes xmlns:a="http://schemas.openxmlformats.org/drawingml/2006/main" xmlns:r="http://schemas.openxmlformats.org/officeDocument/2006/relationships" xmlns:p="http://schemas.openxmlformats.org/presentationml/2006/main">
-  <p:cSld>
-    <p:spTree>
-      <p:nvGrpSpPr>
-        <p:cNvPr id="1" name=""/>
-        <p:cNvGrpSpPr/>
-        <p:nvPr/>
-      </p:nvGrpSpPr>
-      <p:grpSpPr>
-        <a:xfrm>
-          <a:off x="0" y="0"/>
-          <a:ext cx="0" cy="0"/>
-          <a:chOff x="0" y="0"/>
-          <a:chExt cx="0" cy="0"/>
-        </a:xfrm>
-      </p:grpSpPr>
-      <p:sp>
-        <p:nvSpPr>
-          <p:cNvPr id="2" name="幻灯片图像占位符 1"/>
-          <p:cNvSpPr>
-            <a:spLocks noGrp="1" noRot="1" noChangeAspect="1"/>
-          </p:cNvSpPr>
-          <p:nvPr>
-            <p:ph type="sldImg"/>
-          </p:nvPr>
-        </p:nvSpPr>
-        <p:spPr/>
-        <p:txBody>
-          <a:bodyPr/>
-          <a:lstStyle/>
-          <a:p>
-            <a:endParaRPr lang="zh-CN" altLang="en-US"/>
-          </a:p>
-        </p:txBody>
-      </p:sp>
-      <p:sp>
-        <p:nvSpPr>
-          <p:cNvPr id="3" name="备注占位符 2"/>
-          <p:cNvSpPr>
-            <a:spLocks noGrp="1"/>
-          </p:cNvSpPr>
-          <p:nvPr>
-            <p:ph type="body" idx="1"/>
-          </p:nvPr>
-        </p:nvSpPr>
-        <p:spPr/>
-        <p:txBody>
-          <a:bodyPr/>
-          <a:lstStyle/>
-          <a:p>
-            <a:endParaRPr lang="zh-CN" altLang="en-US" dirty="0"/>
-          </a:p>
-        </p:txBody>
-      </p:sp>
-      <p:sp>
-        <p:nvSpPr>
-          <p:cNvPr id="4" name="灯片编号占位符 3"/>
-          <p:cNvSpPr>
-            <a:spLocks noGrp="1"/>
-          </p:cNvSpPr>
-          <p:nvPr>
-            <p:ph type="sldNum" sz="quarter" idx="5"/>
-          </p:nvPr>
-        </p:nvSpPr>
-        <p:spPr/>
-        <p:txBody>
-          <a:bodyPr/>
-          <a:lstStyle/>
-          <a:p>
-            <a:fld id="{DF1895BC-06EC-475A-97CA-BF53472F2E03}" type="slidenum">
-              <a:rPr lang="de-DE" smtClean="0"/>
-              <a:pPr/>
-              <a:t>29</a:t>
-            </a:fld>
-            <a:endParaRPr lang="de-DE" dirty="0"/>
-          </a:p>
-        </p:txBody>
-      </p:sp>
-    </p:spTree>
-    <p:extLst>
-      <p:ext uri="{BB962C8B-B14F-4D97-AF65-F5344CB8AC3E}">
-        <p14:creationId xmlns:p14="http://schemas.microsoft.com/office/powerpoint/2010/main" val="4186176737"/>
-      </p:ext>
-    </p:extLst>
-  </p:cSld>
-  <p:clrMapOvr>
-    <a:masterClrMapping/>
-  </p:clrMapOvr>
-</p:notes>
-</file>
-
-<file path=ppt/notesSlides/notesSlide11.xml><?xml version="1.0" encoding="utf-8"?>
-<p:notes xmlns:a="http://schemas.openxmlformats.org/drawingml/2006/main" xmlns:r="http://schemas.openxmlformats.org/officeDocument/2006/relationships" xmlns:p="http://schemas.openxmlformats.org/presentationml/2006/main">
-  <p:cSld>
-    <p:spTree>
-      <p:nvGrpSpPr>
-        <p:cNvPr id="1" name="">
-          <a:extLst>
-            <a:ext uri="{FF2B5EF4-FFF2-40B4-BE49-F238E27FC236}">
-              <a16:creationId xmlns:a16="http://schemas.microsoft.com/office/drawing/2014/main" id="{8D36FB09-97AA-7E29-A45A-775B0F9F908E}"/>
-            </a:ext>
-          </a:extLst>
-        </p:cNvPr>
-        <p:cNvGrpSpPr/>
-        <p:nvPr/>
-      </p:nvGrpSpPr>
-      <p:grpSpPr>
-        <a:xfrm>
-          <a:off x="0" y="0"/>
-          <a:ext cx="0" cy="0"/>
-          <a:chOff x="0" y="0"/>
-          <a:chExt cx="0" cy="0"/>
-        </a:xfrm>
-      </p:grpSpPr>
-      <p:sp>
-        <p:nvSpPr>
-          <p:cNvPr id="2" name="幻灯片图像占位符 1">
-            <a:extLst>
-              <a:ext uri="{FF2B5EF4-FFF2-40B4-BE49-F238E27FC236}">
-                <a16:creationId xmlns:a16="http://schemas.microsoft.com/office/drawing/2014/main" id="{C080F85E-744A-3B8D-8811-4AD5135D7910}"/>
-              </a:ext>
-            </a:extLst>
-          </p:cNvPr>
-          <p:cNvSpPr>
-            <a:spLocks noGrp="1" noRot="1" noChangeAspect="1"/>
-          </p:cNvSpPr>
-          <p:nvPr>
-            <p:ph type="sldImg"/>
-          </p:nvPr>
-        </p:nvSpPr>
-        <p:spPr>
-          <a:xfrm>
-            <a:off x="90488" y="744538"/>
-            <a:ext cx="6616700" cy="3722687"/>
-          </a:xfrm>
-        </p:spPr>
-        <p:txBody>
-          <a:bodyPr/>
-          <a:lstStyle/>
-          <a:p>
-            <a:endParaRPr lang="zh-CN" altLang="en-US"/>
-          </a:p>
-        </p:txBody>
-      </p:sp>
-      <p:sp>
-        <p:nvSpPr>
-          <p:cNvPr id="3" name="备注占位符 2">
-            <a:extLst>
-              <a:ext uri="{FF2B5EF4-FFF2-40B4-BE49-F238E27FC236}">
-                <a16:creationId xmlns:a16="http://schemas.microsoft.com/office/drawing/2014/main" id="{2494A4A5-24CF-5C2C-B6A3-5DE10E411098}"/>
-              </a:ext>
-            </a:extLst>
-          </p:cNvPr>
-          <p:cNvSpPr>
-            <a:spLocks noGrp="1"/>
-          </p:cNvSpPr>
-          <p:nvPr>
-            <p:ph type="body" idx="1"/>
-          </p:nvPr>
-        </p:nvSpPr>
-        <p:spPr/>
-        <p:txBody>
-          <a:bodyPr/>
-          <a:lstStyle/>
-          <a:p>
-            <a:endParaRPr lang="zh-CN" altLang="en-US" dirty="0"/>
-          </a:p>
-        </p:txBody>
-      </p:sp>
-      <p:sp>
-        <p:nvSpPr>
-          <p:cNvPr id="4" name="灯片编号占位符 3">
-            <a:extLst>
-              <a:ext uri="{FF2B5EF4-FFF2-40B4-BE49-F238E27FC236}">
-                <a16:creationId xmlns:a16="http://schemas.microsoft.com/office/drawing/2014/main" id="{8021127B-505F-3B1A-2AAA-65DF92B51E67}"/>
-              </a:ext>
-            </a:extLst>
-          </p:cNvPr>
-          <p:cNvSpPr>
-            <a:spLocks noGrp="1"/>
-          </p:cNvSpPr>
-          <p:nvPr>
-            <p:ph type="sldNum" sz="quarter" idx="10"/>
-          </p:nvPr>
-        </p:nvSpPr>
-        <p:spPr/>
-        <p:txBody>
-          <a:bodyPr/>
-          <a:lstStyle/>
-          <a:p>
-            <a:fld id="{DF1895BC-06EC-475A-97CA-BF53472F2E03}" type="slidenum">
-              <a:rPr lang="de-DE" smtClean="0"/>
-              <a:pPr/>
-              <a:t>37</a:t>
-            </a:fld>
-            <a:endParaRPr lang="de-DE" dirty="0"/>
-          </a:p>
-        </p:txBody>
-      </p:sp>
-    </p:spTree>
-    <p:extLst>
-      <p:ext uri="{BB962C8B-B14F-4D97-AF65-F5344CB8AC3E}">
-        <p14:creationId xmlns:p14="http://schemas.microsoft.com/office/powerpoint/2010/main" val="1157948595"/>
-      </p:ext>
-    </p:extLst>
-  </p:cSld>
-  <p:clrMapOvr>
-    <a:masterClrMapping/>
-  </p:clrMapOvr>
-</p:notes>
-</file>
-
 <file path=ppt/notesSlides/notesSlide2.xml><?xml version="1.0" encoding="utf-8"?>
 <p:notes xmlns:a="http://schemas.openxmlformats.org/drawingml/2006/main" xmlns:r="http://schemas.openxmlformats.org/officeDocument/2006/relationships" xmlns:p="http://schemas.openxmlformats.org/presentationml/2006/main">
   <p:cSld>
@@ -1876,6 +1663,13 @@
           </p:nvPr>
         </p:nvSpPr>
         <p:spPr/>
+        <p:txBody>
+          <a:bodyPr/>
+          <a:lstStyle/>
+          <a:p>
+            <a:endParaRPr lang="zh-CN" altLang="en-US"/>
+          </a:p>
+        </p:txBody>
       </p:sp>
       <p:sp>
         <p:nvSpPr>
@@ -1892,10 +1686,6 @@
           <a:bodyPr/>
           <a:lstStyle/>
           <a:p>
-            <a:r>
-              <a:rPr lang="en-US" altLang="zh-CN" dirty="0"/>
-              <a:t>So we will firstly build the main function. And we can create several component functions to handle specific operation of the aircraft, like aerodynamic, like vehicle,</a:t>
-            </a:r>
             <a:endParaRPr lang="zh-CN" altLang="en-US" dirty="0"/>
           </a:p>
         </p:txBody>
@@ -1918,7 +1708,7 @@
             <a:fld id="{DF1895BC-06EC-475A-97CA-BF53472F2E03}" type="slidenum">
               <a:rPr lang="de-DE" smtClean="0"/>
               <a:pPr/>
-              <a:t>8</a:t>
+              <a:t>29</a:t>
             </a:fld>
             <a:endParaRPr lang="de-DE" dirty="0"/>
           </a:p>
@@ -1927,7 +1717,7 @@
     </p:spTree>
     <p:extLst>
       <p:ext uri="{BB962C8B-B14F-4D97-AF65-F5344CB8AC3E}">
-        <p14:creationId xmlns:p14="http://schemas.microsoft.com/office/powerpoint/2010/main" val="412570590"/>
+        <p14:creationId xmlns:p14="http://schemas.microsoft.com/office/powerpoint/2010/main" val="4186176737"/>
       </p:ext>
     </p:extLst>
   </p:cSld>
@@ -1942,7 +1732,13 @@
   <p:cSld>
     <p:spTree>
       <p:nvGrpSpPr>
-        <p:cNvPr id="1" name=""/>
+        <p:cNvPr id="1" name="">
+          <a:extLst>
+            <a:ext uri="{FF2B5EF4-FFF2-40B4-BE49-F238E27FC236}">
+              <a16:creationId xmlns:a16="http://schemas.microsoft.com/office/drawing/2014/main" id="{8D36FB09-97AA-7E29-A45A-775B0F9F908E}"/>
+            </a:ext>
+          </a:extLst>
+        </p:cNvPr>
         <p:cNvGrpSpPr/>
         <p:nvPr/>
       </p:nvGrpSpPr>
@@ -1956,7 +1752,13 @@
       </p:grpSpPr>
       <p:sp>
         <p:nvSpPr>
-          <p:cNvPr id="2" name="幻灯片图像占位符 1"/>
+          <p:cNvPr id="2" name="幻灯片图像占位符 1">
+            <a:extLst>
+              <a:ext uri="{FF2B5EF4-FFF2-40B4-BE49-F238E27FC236}">
+                <a16:creationId xmlns:a16="http://schemas.microsoft.com/office/drawing/2014/main" id="{C080F85E-744A-3B8D-8811-4AD5135D7910}"/>
+              </a:ext>
+            </a:extLst>
+          </p:cNvPr>
           <p:cNvSpPr>
             <a:spLocks noGrp="1" noRot="1" noChangeAspect="1"/>
           </p:cNvSpPr>
@@ -1964,11 +1766,29 @@
             <p:ph type="sldImg"/>
           </p:nvPr>
         </p:nvSpPr>
-        <p:spPr/>
+        <p:spPr>
+          <a:xfrm>
+            <a:off x="90488" y="744538"/>
+            <a:ext cx="6616700" cy="3722687"/>
+          </a:xfrm>
+        </p:spPr>
+        <p:txBody>
+          <a:bodyPr/>
+          <a:lstStyle/>
+          <a:p>
+            <a:endParaRPr lang="zh-CN" altLang="en-US"/>
+          </a:p>
+        </p:txBody>
       </p:sp>
       <p:sp>
         <p:nvSpPr>
-          <p:cNvPr id="3" name="备注占位符 2"/>
+          <p:cNvPr id="3" name="备注占位符 2">
+            <a:extLst>
+              <a:ext uri="{FF2B5EF4-FFF2-40B4-BE49-F238E27FC236}">
+                <a16:creationId xmlns:a16="http://schemas.microsoft.com/office/drawing/2014/main" id="{2494A4A5-24CF-5C2C-B6A3-5DE10E411098}"/>
+              </a:ext>
+            </a:extLst>
+          </p:cNvPr>
           <p:cNvSpPr>
             <a:spLocks noGrp="1"/>
           </p:cNvSpPr>
@@ -1981,38 +1801,24 @@
           <a:bodyPr/>
           <a:lstStyle/>
           <a:p>
-            <a:r>
-              <a:rPr lang="en-US" altLang="zh-CN" dirty="0"/>
-              <a:t>Once we have finished the main function, the basic framework for aircraft design, the first module will be developed first is the </a:t>
-            </a:r>
-            <a:r>
-              <a:rPr lang="en-US" altLang="zh-CN" dirty="0" err="1"/>
-              <a:t>base_analysis</a:t>
-            </a:r>
-            <a:r>
-              <a:rPr lang="en-US" altLang="zh-CN" dirty="0"/>
-              <a:t> function. To start we need to define the output of this function, we want this function can return a analyses </a:t>
-            </a:r>
-            <a:r>
-              <a:rPr lang="en-US" altLang="zh-CN" dirty="0" err="1"/>
-              <a:t>modoule</a:t>
-            </a:r>
-            <a:r>
-              <a:rPr lang="en-US" altLang="zh-CN" dirty="0"/>
-              <a:t> so that we can use it in other steps of aircraft</a:t>
-            </a:r>
             <a:endParaRPr lang="zh-CN" altLang="en-US" dirty="0"/>
           </a:p>
         </p:txBody>
       </p:sp>
       <p:sp>
         <p:nvSpPr>
-          <p:cNvPr id="4" name="灯片编号占位符 3"/>
+          <p:cNvPr id="4" name="灯片编号占位符 3">
+            <a:extLst>
+              <a:ext uri="{FF2B5EF4-FFF2-40B4-BE49-F238E27FC236}">
+                <a16:creationId xmlns:a16="http://schemas.microsoft.com/office/drawing/2014/main" id="{8021127B-505F-3B1A-2AAA-65DF92B51E67}"/>
+              </a:ext>
+            </a:extLst>
+          </p:cNvPr>
           <p:cNvSpPr>
             <a:spLocks noGrp="1"/>
           </p:cNvSpPr>
           <p:nvPr>
-            <p:ph type="sldNum" sz="quarter" idx="5"/>
+            <p:ph type="sldNum" sz="quarter" idx="10"/>
           </p:nvPr>
         </p:nvSpPr>
         <p:spPr/>
@@ -2023,7 +1829,7 @@
             <a:fld id="{DF1895BC-06EC-475A-97CA-BF53472F2E03}" type="slidenum">
               <a:rPr lang="de-DE" smtClean="0"/>
               <a:pPr/>
-              <a:t>9</a:t>
+              <a:t>37</a:t>
             </a:fld>
             <a:endParaRPr lang="de-DE" dirty="0"/>
           </a:p>
@@ -2032,7 +1838,7 @@
     </p:spTree>
     <p:extLst>
       <p:ext uri="{BB962C8B-B14F-4D97-AF65-F5344CB8AC3E}">
-        <p14:creationId xmlns:p14="http://schemas.microsoft.com/office/powerpoint/2010/main" val="1830046621"/>
+        <p14:creationId xmlns:p14="http://schemas.microsoft.com/office/powerpoint/2010/main" val="1157948595"/>
       </p:ext>
     </p:extLst>
   </p:cSld>
@@ -39551,7 +39357,7 @@
                 <a:ea typeface="微软雅黑" panose="020B0503020204020204" pitchFamily="34" charset="-122"/>
                 <a:cs typeface="Arial" pitchFamily="34" charset="0"/>
               </a:rPr>
-              <a:t>pip install -r requirements-dev.txt</a:t>
+              <a:t>pip install -r requirements.txt</a:t>
             </a:r>
           </a:p>
         </p:txBody>

--- a/Design Conceptual Aircraft via SUAVE.pptx
+++ b/Design Conceptual Aircraft via SUAVE.pptx
@@ -327,7 +327,7 @@
             <a:fld id="{D7F4AE8B-A150-4820-BC27-EE42D733F4B8}" type="datetimeFigureOut">
               <a:rPr lang="en-GB" smtClean="0"/>
               <a:pPr/>
-              <a:t>22/04/2026</a:t>
+              <a:t>25/04/2026</a:t>
             </a:fld>
             <a:endParaRPr lang="en-GB"/>
           </a:p>
@@ -499,7 +499,7 @@
             <a:fld id="{45B75E70-762A-4375-AA7C-DE9BB7CC9339}" type="datetimeFigureOut">
               <a:rPr lang="de-DE" smtClean="0"/>
               <a:pPr/>
-              <a:t>21.04.2026</a:t>
+              <a:t>25.04.2026</a:t>
             </a:fld>
             <a:endParaRPr lang="de-DE" dirty="0"/>
           </a:p>
@@ -860,9 +860,8 @@
           <a:p>
             <a:r>
               <a:rPr lang="en-US" altLang="zh-CN" dirty="0"/>
-              <a:t>Aircraft design and SUAVE are both really complex. I can’t make you a SUAVE expert or an aircraft design expert just with this one class. It’s just not possible. So like I said, today we are just having a discussion. If you have any questions, or if you think I’ve said something wrong during class, just interrupt me any time.</a:t>
-            </a:r>
-            <a:endParaRPr lang="zh-CN" altLang="en-US" dirty="0"/>
+              <a:t>Aircraft design and SUAVE are both really complex. I can’t make you a SUAVE expert or an aircraft design expert just with this one class. It’s just impossible. So like I said, today we are just having a discussion. If you have any questions, or if you think I’ve said something wrong during class, just interrupt me any time.</a:t>
+            </a:r>
           </a:p>
         </p:txBody>
       </p:sp>
@@ -894,6 +893,219 @@
     <p:extLst>
       <p:ext uri="{BB962C8B-B14F-4D97-AF65-F5344CB8AC3E}">
         <p14:creationId xmlns:p14="http://schemas.microsoft.com/office/powerpoint/2010/main" val="2833748843"/>
+      </p:ext>
+    </p:extLst>
+  </p:cSld>
+  <p:clrMapOvr>
+    <a:masterClrMapping/>
+  </p:clrMapOvr>
+</p:notes>
+</file>
+
+<file path=ppt/notesSlides/notesSlide10.xml><?xml version="1.0" encoding="utf-8"?>
+<p:notes xmlns:a="http://schemas.openxmlformats.org/drawingml/2006/main" xmlns:r="http://schemas.openxmlformats.org/officeDocument/2006/relationships" xmlns:p="http://schemas.openxmlformats.org/presentationml/2006/main">
+  <p:cSld>
+    <p:spTree>
+      <p:nvGrpSpPr>
+        <p:cNvPr id="1" name=""/>
+        <p:cNvGrpSpPr/>
+        <p:nvPr/>
+      </p:nvGrpSpPr>
+      <p:grpSpPr>
+        <a:xfrm>
+          <a:off x="0" y="0"/>
+          <a:ext cx="0" cy="0"/>
+          <a:chOff x="0" y="0"/>
+          <a:chExt cx="0" cy="0"/>
+        </a:xfrm>
+      </p:grpSpPr>
+      <p:sp>
+        <p:nvSpPr>
+          <p:cNvPr id="2" name="幻灯片图像占位符 1"/>
+          <p:cNvSpPr>
+            <a:spLocks noGrp="1" noRot="1" noChangeAspect="1"/>
+          </p:cNvSpPr>
+          <p:nvPr>
+            <p:ph type="sldImg"/>
+          </p:nvPr>
+        </p:nvSpPr>
+        <p:spPr/>
+        <p:txBody>
+          <a:bodyPr/>
+          <a:lstStyle/>
+          <a:p>
+            <a:endParaRPr lang="zh-CN" altLang="en-US"/>
+          </a:p>
+        </p:txBody>
+      </p:sp>
+      <p:sp>
+        <p:nvSpPr>
+          <p:cNvPr id="3" name="备注占位符 2"/>
+          <p:cNvSpPr>
+            <a:spLocks noGrp="1"/>
+          </p:cNvSpPr>
+          <p:nvPr>
+            <p:ph type="body" idx="1"/>
+          </p:nvPr>
+        </p:nvSpPr>
+        <p:spPr/>
+        <p:txBody>
+          <a:bodyPr/>
+          <a:lstStyle/>
+          <a:p>
+            <a:endParaRPr lang="zh-CN" altLang="en-US" dirty="0"/>
+          </a:p>
+        </p:txBody>
+      </p:sp>
+      <p:sp>
+        <p:nvSpPr>
+          <p:cNvPr id="4" name="灯片编号占位符 3"/>
+          <p:cNvSpPr>
+            <a:spLocks noGrp="1"/>
+          </p:cNvSpPr>
+          <p:nvPr>
+            <p:ph type="sldNum" sz="quarter" idx="5"/>
+          </p:nvPr>
+        </p:nvSpPr>
+        <p:spPr/>
+        <p:txBody>
+          <a:bodyPr/>
+          <a:lstStyle/>
+          <a:p>
+            <a:fld id="{DF1895BC-06EC-475A-97CA-BF53472F2E03}" type="slidenum">
+              <a:rPr lang="de-DE" smtClean="0"/>
+              <a:pPr/>
+              <a:t>29</a:t>
+            </a:fld>
+            <a:endParaRPr lang="de-DE" dirty="0"/>
+          </a:p>
+        </p:txBody>
+      </p:sp>
+    </p:spTree>
+    <p:extLst>
+      <p:ext uri="{BB962C8B-B14F-4D97-AF65-F5344CB8AC3E}">
+        <p14:creationId xmlns:p14="http://schemas.microsoft.com/office/powerpoint/2010/main" val="4186176737"/>
+      </p:ext>
+    </p:extLst>
+  </p:cSld>
+  <p:clrMapOvr>
+    <a:masterClrMapping/>
+  </p:clrMapOvr>
+</p:notes>
+</file>
+
+<file path=ppt/notesSlides/notesSlide11.xml><?xml version="1.0" encoding="utf-8"?>
+<p:notes xmlns:a="http://schemas.openxmlformats.org/drawingml/2006/main" xmlns:r="http://schemas.openxmlformats.org/officeDocument/2006/relationships" xmlns:p="http://schemas.openxmlformats.org/presentationml/2006/main">
+  <p:cSld>
+    <p:spTree>
+      <p:nvGrpSpPr>
+        <p:cNvPr id="1" name="">
+          <a:extLst>
+            <a:ext uri="{FF2B5EF4-FFF2-40B4-BE49-F238E27FC236}">
+              <a16:creationId xmlns:a16="http://schemas.microsoft.com/office/drawing/2014/main" id="{8D36FB09-97AA-7E29-A45A-775B0F9F908E}"/>
+            </a:ext>
+          </a:extLst>
+        </p:cNvPr>
+        <p:cNvGrpSpPr/>
+        <p:nvPr/>
+      </p:nvGrpSpPr>
+      <p:grpSpPr>
+        <a:xfrm>
+          <a:off x="0" y="0"/>
+          <a:ext cx="0" cy="0"/>
+          <a:chOff x="0" y="0"/>
+          <a:chExt cx="0" cy="0"/>
+        </a:xfrm>
+      </p:grpSpPr>
+      <p:sp>
+        <p:nvSpPr>
+          <p:cNvPr id="2" name="幻灯片图像占位符 1">
+            <a:extLst>
+              <a:ext uri="{FF2B5EF4-FFF2-40B4-BE49-F238E27FC236}">
+                <a16:creationId xmlns:a16="http://schemas.microsoft.com/office/drawing/2014/main" id="{C080F85E-744A-3B8D-8811-4AD5135D7910}"/>
+              </a:ext>
+            </a:extLst>
+          </p:cNvPr>
+          <p:cNvSpPr>
+            <a:spLocks noGrp="1" noRot="1" noChangeAspect="1"/>
+          </p:cNvSpPr>
+          <p:nvPr>
+            <p:ph type="sldImg"/>
+          </p:nvPr>
+        </p:nvSpPr>
+        <p:spPr>
+          <a:xfrm>
+            <a:off x="90488" y="744538"/>
+            <a:ext cx="6616700" cy="3722687"/>
+          </a:xfrm>
+        </p:spPr>
+        <p:txBody>
+          <a:bodyPr/>
+          <a:lstStyle/>
+          <a:p>
+            <a:endParaRPr lang="zh-CN" altLang="en-US"/>
+          </a:p>
+        </p:txBody>
+      </p:sp>
+      <p:sp>
+        <p:nvSpPr>
+          <p:cNvPr id="3" name="备注占位符 2">
+            <a:extLst>
+              <a:ext uri="{FF2B5EF4-FFF2-40B4-BE49-F238E27FC236}">
+                <a16:creationId xmlns:a16="http://schemas.microsoft.com/office/drawing/2014/main" id="{2494A4A5-24CF-5C2C-B6A3-5DE10E411098}"/>
+              </a:ext>
+            </a:extLst>
+          </p:cNvPr>
+          <p:cNvSpPr>
+            <a:spLocks noGrp="1"/>
+          </p:cNvSpPr>
+          <p:nvPr>
+            <p:ph type="body" idx="1"/>
+          </p:nvPr>
+        </p:nvSpPr>
+        <p:spPr/>
+        <p:txBody>
+          <a:bodyPr/>
+          <a:lstStyle/>
+          <a:p>
+            <a:endParaRPr lang="zh-CN" altLang="en-US" dirty="0"/>
+          </a:p>
+        </p:txBody>
+      </p:sp>
+      <p:sp>
+        <p:nvSpPr>
+          <p:cNvPr id="4" name="灯片编号占位符 3">
+            <a:extLst>
+              <a:ext uri="{FF2B5EF4-FFF2-40B4-BE49-F238E27FC236}">
+                <a16:creationId xmlns:a16="http://schemas.microsoft.com/office/drawing/2014/main" id="{8021127B-505F-3B1A-2AAA-65DF92B51E67}"/>
+              </a:ext>
+            </a:extLst>
+          </p:cNvPr>
+          <p:cNvSpPr>
+            <a:spLocks noGrp="1"/>
+          </p:cNvSpPr>
+          <p:nvPr>
+            <p:ph type="sldNum" sz="quarter" idx="10"/>
+          </p:nvPr>
+        </p:nvSpPr>
+        <p:spPr/>
+        <p:txBody>
+          <a:bodyPr/>
+          <a:lstStyle/>
+          <a:p>
+            <a:fld id="{DF1895BC-06EC-475A-97CA-BF53472F2E03}" type="slidenum">
+              <a:rPr lang="de-DE" smtClean="0"/>
+              <a:pPr/>
+              <a:t>37</a:t>
+            </a:fld>
+            <a:endParaRPr lang="de-DE" dirty="0"/>
+          </a:p>
+        </p:txBody>
+      </p:sp>
+    </p:spTree>
+    <p:extLst>
+      <p:ext uri="{BB962C8B-B14F-4D97-AF65-F5344CB8AC3E}">
+        <p14:creationId xmlns:p14="http://schemas.microsoft.com/office/powerpoint/2010/main" val="1157948595"/>
       </p:ext>
     </p:extLst>
   </p:cSld>
@@ -981,7 +1193,6 @@
               <a:rPr lang="en-US" altLang="zh-CN" dirty="0"/>
               <a:t>Here is what we’ll do today. We’ll start with a background of SUAVE, then I will help you install the suave, run a test case, and build your first case yourself. After that, I will introduce some main modules of SUAVE so that you can have a deeper insight into this code. If we have extra time, I will show some examples of how to create custom modules.</a:t>
             </a:r>
-            <a:endParaRPr lang="zh-CN" altLang="en-US" dirty="0"/>
           </a:p>
         </p:txBody>
       </p:sp>
@@ -1380,97 +1591,8 @@
           <a:p>
             <a:r>
               <a:rPr lang="en-US" altLang="zh-CN" dirty="0"/>
-              <a:t>Open the Tutorial folder, find the tut_mission_B737.py script, run it</a:t>
-            </a:r>
-          </a:p>
-          <a:p>
-            <a:r>
-              <a:rPr lang="en-US" altLang="zh-CN" dirty="0"/>
-              <a:t>Just wait a minute — I think it’ll take about one minute.</a:t>
-            </a:r>
-          </a:p>
-          <a:p>
-            <a:r>
-              <a:rPr lang="en-US" altLang="zh-CN" dirty="0"/>
-              <a:t>Then you’ll see </a:t>
-            </a:r>
-            <a:r>
-              <a:rPr lang="en-US" altLang="zh-CN" sz="1200" b="1" kern="1200" dirty="0">
-                <a:solidFill>
-                  <a:schemeClr val="tx1"/>
-                </a:solidFill>
-                <a:effectLst/>
-                <a:latin typeface="Arial" pitchFamily="34" charset="0"/>
-                <a:ea typeface="+mn-ea"/>
-                <a:cs typeface="+mn-cs"/>
-              </a:rPr>
-              <a:t>lots of plots fill your whole screen</a:t>
-            </a:r>
-            <a:r>
-              <a:rPr lang="en-US" altLang="zh-CN" dirty="0"/>
-              <a:t>! Like this</a:t>
-            </a:r>
-          </a:p>
-          <a:p>
-            <a:r>
-              <a:rPr lang="en-US" altLang="zh-CN" dirty="0"/>
-              <a:t>Altitude, weight, lift, drag… all kinds of information will pop up right in front of you.</a:t>
-            </a:r>
-          </a:p>
-          <a:p>
-            <a:r>
-              <a:rPr lang="en-US" altLang="zh-CN" dirty="0"/>
-              <a:t>Don’t worry. We’ll go through these plots together later.</a:t>
-            </a:r>
-          </a:p>
-          <a:p>
-            <a:r>
-              <a:rPr lang="en-US" altLang="zh-CN" dirty="0"/>
-              <a:t>This is just to check / if you’ve installed SUAVE correctly.</a:t>
-            </a:r>
-          </a:p>
-          <a:p>
-            <a:r>
-              <a:rPr lang="en-US" altLang="zh-CN" dirty="0"/>
-              <a:t>If you don’t see those plots, / just let me know.</a:t>
-            </a:r>
-          </a:p>
-          <a:p>
-            <a:r>
-              <a:rPr lang="en-US" altLang="zh-CN" dirty="0"/>
-              <a:t>Alright?</a:t>
-            </a:r>
-          </a:p>
-          <a:p>
-            <a:r>
-              <a:rPr lang="en-US" altLang="zh-CN" sz="1200" b="0" kern="1200" dirty="0">
-                <a:solidFill>
-                  <a:schemeClr val="tx1"/>
-                </a:solidFill>
-                <a:effectLst/>
-                <a:latin typeface="Arial" pitchFamily="34" charset="0"/>
-                <a:ea typeface="+mn-ea"/>
-                <a:cs typeface="+mn-cs"/>
-              </a:rPr>
-              <a:t>Alright, we’ve got SUAVE installed.</a:t>
-            </a:r>
-          </a:p>
-          <a:p>
-            <a:r>
-              <a:rPr lang="en-US" altLang="zh-CN" sz="1200" b="0" kern="1200" dirty="0">
-                <a:solidFill>
-                  <a:schemeClr val="tx1"/>
-                </a:solidFill>
-                <a:effectLst/>
-                <a:latin typeface="Arial" pitchFamily="34" charset="0"/>
-                <a:ea typeface="+mn-ea"/>
-                <a:cs typeface="+mn-cs"/>
-              </a:rPr>
-              <a:t>Now it’s time to learn how to use it.</a:t>
-            </a:r>
-          </a:p>
-          <a:p>
-            <a:endParaRPr lang="zh-CN" altLang="en-US" dirty="0"/>
+              <a:t>Open the Tutorial folder, find the tut_mission_B737.py script, run it and just wait a minute — I think it’ll take about one minute. Then you’ll see lots of plots fill your whole screen! Like this, altitude, weight, lift, drag… all kinds of information will pop up right in front of you. don’t worry. We’ll go through these plots together later. this is just to check if you’ve installed SUAVE correctly. If you don’t see those plots, just let me know. Alright? Alright, we’ve got SUAVE installed.</a:t>
+            </a:r>
           </a:p>
         </p:txBody>
       </p:sp>
@@ -1556,44 +1678,16 @@
           <a:lstStyle/>
           <a:p>
             <a:r>
-              <a:rPr lang="en-US" altLang="zh-CN" sz="1200" b="0" kern="1200" dirty="0">
-                <a:solidFill>
-                  <a:schemeClr val="tx1"/>
-                </a:solidFill>
-                <a:effectLst/>
-                <a:latin typeface="Arial" pitchFamily="34" charset="0"/>
-                <a:ea typeface="+mn-ea"/>
-                <a:cs typeface="+mn-cs"/>
-              </a:rPr>
-              <a:t>Wait, no—before we start coding,</a:t>
-            </a:r>
-          </a:p>
-          <a:p>
-            <a:r>
-              <a:rPr lang="en-US" altLang="zh-CN" sz="1200" b="0" kern="1200" dirty="0">
-                <a:solidFill>
-                  <a:schemeClr val="tx1"/>
-                </a:solidFill>
-                <a:effectLst/>
-                <a:latin typeface="Arial" pitchFamily="34" charset="0"/>
-                <a:ea typeface="+mn-ea"/>
-                <a:cs typeface="+mn-cs"/>
-              </a:rPr>
-              <a:t>we need to figure out what we actually need to design an aircraft.</a:t>
-            </a:r>
-          </a:p>
-          <a:p>
-            <a:r>
-              <a:rPr lang="en-US" altLang="zh-CN" sz="1200" b="0" kern="1200" dirty="0">
-                <a:solidFill>
-                  <a:schemeClr val="tx1"/>
-                </a:solidFill>
-                <a:effectLst/>
-                <a:latin typeface="Arial" pitchFamily="34" charset="0"/>
-                <a:ea typeface="+mn-ea"/>
-                <a:cs typeface="+mn-cs"/>
-              </a:rPr>
-              <a:t>First is why we need this aircraft</a:t>
+              <a:rPr lang="en-US" altLang="zh-CN" dirty="0"/>
+              <a:t>Before we start working on our first SUAVE case, we first need to understand what conceptual aircraft design is, or more simply, what steps we need to go through. This is the overall conceptual design process; it’s not super formal, but it includes all the key steps. First, we need to figure out our aircraft requirements: whether we’re designing a fighter jet, helicopter or transport aircraft, how many missiles the fighter carries, if the helicopter is for rescue or combat missions, and what range the transport aircraft needs. These are all our basic requirements. Once we confirm the requirements, we define the whole flight mission, including takeoff, climb, cruise, descent, landing and other possible mission phases. After setting up the mission, we calculate initial aircraft parameters with standard formulas, such as maximum takeoff weight using the Breguet formula. Then we sketch out the aircraft layout. I mean sketch, not final design — at this point we don’t have any detailed aircraft data, the aircraft doesn’t even exist yet. We can model it in </a:t>
+            </a:r>
+            <a:r>
+              <a:rPr lang="en-US" altLang="zh-CN" dirty="0" err="1"/>
+              <a:t>OpenVSP</a:t>
+            </a:r>
+            <a:r>
+              <a:rPr lang="en-US" altLang="zh-CN" dirty="0"/>
+              <a:t>, or even just draw it on a napkin, and use our imagination to build our own aircraft. After that we do analyses like aerodynamics, weight updates and thrust analysis, and check if our aircraft can finish the mission. If not, we go back and adjust the design repeatedly until it meets the requirements. You’ve already learned all this aircraft design knowledge from Professor Zhang, so I won’t talk too much about it, and now let’s focus on how to use SUAVE in this whole design process.</a:t>
             </a:r>
           </a:p>
         </p:txBody>
@@ -1663,13 +1757,6 @@
           </p:nvPr>
         </p:nvSpPr>
         <p:spPr/>
-        <p:txBody>
-          <a:bodyPr/>
-          <a:lstStyle/>
-          <a:p>
-            <a:endParaRPr lang="zh-CN" altLang="en-US"/>
-          </a:p>
-        </p:txBody>
       </p:sp>
       <p:sp>
         <p:nvSpPr>
@@ -1685,6 +1772,54 @@
         <p:txBody>
           <a:bodyPr/>
           <a:lstStyle/>
+          <a:p>
+            <a:pPr marL="0" marR="0" lvl="0" indent="0" algn="l" defTabSz="914400" rtl="0" eaLnBrk="1" fontAlgn="auto" latinLnBrk="0" hangingPunct="1">
+              <a:lnSpc>
+                <a:spcPct val="100000"/>
+              </a:lnSpc>
+              <a:spcBef>
+                <a:spcPts val="0"/>
+              </a:spcBef>
+              <a:spcAft>
+                <a:spcPts val="0"/>
+              </a:spcAft>
+              <a:buClrTx/>
+              <a:buSzTx/>
+              <a:buFontTx/>
+              <a:buNone/>
+              <a:tabLst/>
+              <a:defRPr/>
+            </a:pPr>
+            <a:r>
+              <a:rPr lang="en-US" altLang="zh-CN" dirty="0"/>
+              <a:t>So we will firstly build the main function. And we can create several component functions to handle specific operation of the aircraft, like aerodynamic module, or vehicle setup function, maybe we</a:t>
+            </a:r>
+            <a:r>
+              <a:rPr lang="zh-CN" altLang="en-US" dirty="0"/>
+              <a:t> </a:t>
+            </a:r>
+            <a:r>
+              <a:rPr lang="en-US" altLang="zh-CN" dirty="0"/>
+              <a:t>will</a:t>
+            </a:r>
+            <a:r>
+              <a:rPr lang="zh-CN" altLang="en-US" dirty="0"/>
+              <a:t> </a:t>
+            </a:r>
+            <a:r>
+              <a:rPr lang="en-US" altLang="zh-CN" dirty="0"/>
+              <a:t>write some aircraft parameters in this function later. So in this stage we just create and type the “pass” in these component functions, just to make sure this script can be </a:t>
+            </a:r>
+            <a:r>
+              <a:rPr lang="en-US" altLang="zh-CN" dirty="0" err="1"/>
+              <a:t>runned</a:t>
+            </a:r>
+            <a:r>
+              <a:rPr lang="en-US" altLang="zh-CN" dirty="0"/>
+              <a:t> normally later.</a:t>
+            </a:r>
+            <a:endParaRPr lang="zh-CN" altLang="en-US" dirty="0"/>
+          </a:p>
           <a:p>
             <a:endParaRPr lang="zh-CN" altLang="en-US" dirty="0"/>
           </a:p>
@@ -1708,7 +1843,7 @@
             <a:fld id="{DF1895BC-06EC-475A-97CA-BF53472F2E03}" type="slidenum">
               <a:rPr lang="de-DE" smtClean="0"/>
               <a:pPr/>
-              <a:t>29</a:t>
+              <a:t>8</a:t>
             </a:fld>
             <a:endParaRPr lang="de-DE" dirty="0"/>
           </a:p>
@@ -1717,7 +1852,7 @@
     </p:spTree>
     <p:extLst>
       <p:ext uri="{BB962C8B-B14F-4D97-AF65-F5344CB8AC3E}">
-        <p14:creationId xmlns:p14="http://schemas.microsoft.com/office/powerpoint/2010/main" val="4186176737"/>
+        <p14:creationId xmlns:p14="http://schemas.microsoft.com/office/powerpoint/2010/main" val="2874908408"/>
       </p:ext>
     </p:extLst>
   </p:cSld>
@@ -1732,13 +1867,7 @@
   <p:cSld>
     <p:spTree>
       <p:nvGrpSpPr>
-        <p:cNvPr id="1" name="">
-          <a:extLst>
-            <a:ext uri="{FF2B5EF4-FFF2-40B4-BE49-F238E27FC236}">
-              <a16:creationId xmlns:a16="http://schemas.microsoft.com/office/drawing/2014/main" id="{8D36FB09-97AA-7E29-A45A-775B0F9F908E}"/>
-            </a:ext>
-          </a:extLst>
-        </p:cNvPr>
+        <p:cNvPr id="1" name=""/>
         <p:cNvGrpSpPr/>
         <p:nvPr/>
       </p:nvGrpSpPr>
@@ -1752,13 +1881,7 @@
       </p:grpSpPr>
       <p:sp>
         <p:nvSpPr>
-          <p:cNvPr id="2" name="幻灯片图像占位符 1">
-            <a:extLst>
-              <a:ext uri="{FF2B5EF4-FFF2-40B4-BE49-F238E27FC236}">
-                <a16:creationId xmlns:a16="http://schemas.microsoft.com/office/drawing/2014/main" id="{C080F85E-744A-3B8D-8811-4AD5135D7910}"/>
-              </a:ext>
-            </a:extLst>
-          </p:cNvPr>
+          <p:cNvPr id="2" name="幻灯片图像占位符 1"/>
           <p:cNvSpPr>
             <a:spLocks noGrp="1" noRot="1" noChangeAspect="1"/>
           </p:cNvSpPr>
@@ -1766,29 +1889,11 @@
             <p:ph type="sldImg"/>
           </p:nvPr>
         </p:nvSpPr>
-        <p:spPr>
-          <a:xfrm>
-            <a:off x="90488" y="744538"/>
-            <a:ext cx="6616700" cy="3722687"/>
-          </a:xfrm>
-        </p:spPr>
-        <p:txBody>
-          <a:bodyPr/>
-          <a:lstStyle/>
-          <a:p>
-            <a:endParaRPr lang="zh-CN" altLang="en-US"/>
-          </a:p>
-        </p:txBody>
+        <p:spPr/>
       </p:sp>
       <p:sp>
         <p:nvSpPr>
-          <p:cNvPr id="3" name="备注占位符 2">
-            <a:extLst>
-              <a:ext uri="{FF2B5EF4-FFF2-40B4-BE49-F238E27FC236}">
-                <a16:creationId xmlns:a16="http://schemas.microsoft.com/office/drawing/2014/main" id="{2494A4A5-24CF-5C2C-B6A3-5DE10E411098}"/>
-              </a:ext>
-            </a:extLst>
-          </p:cNvPr>
+          <p:cNvPr id="3" name="备注占位符 2"/>
           <p:cNvSpPr>
             <a:spLocks noGrp="1"/>
           </p:cNvSpPr>
@@ -1801,24 +1906,74 @@
           <a:bodyPr/>
           <a:lstStyle/>
           <a:p>
-            <a:endParaRPr lang="zh-CN" altLang="en-US" dirty="0"/>
+            <a:pPr marL="0" marR="0" lvl="0" indent="0" algn="l" defTabSz="914400" rtl="0" eaLnBrk="1" fontAlgn="auto" latinLnBrk="0" hangingPunct="1">
+              <a:lnSpc>
+                <a:spcPct val="100000"/>
+              </a:lnSpc>
+              <a:spcBef>
+                <a:spcPts val="0"/>
+              </a:spcBef>
+              <a:spcAft>
+                <a:spcPts val="0"/>
+              </a:spcAft>
+              <a:buClrTx/>
+              <a:buSzTx/>
+              <a:buFontTx/>
+              <a:buNone/>
+              <a:tabLst/>
+              <a:defRPr/>
+            </a:pPr>
+            <a:r>
+              <a:rPr lang="en-US" altLang="zh-CN" dirty="0"/>
+              <a:t>Once we have finished the main function, the basic framework for aircraft design, the first module will be developed is the </a:t>
+            </a:r>
+            <a:r>
+              <a:rPr lang="en-US" altLang="zh-CN" dirty="0" err="1"/>
+              <a:t>base_analysis</a:t>
+            </a:r>
+            <a:r>
+              <a:rPr lang="en-US" altLang="zh-CN" dirty="0"/>
+              <a:t> function. To start we need to define the output of this function, we want this function can return a analyses module so that we can use it to analysis the aerodynamic character of our aircraft in other steps. We create a </a:t>
+            </a:r>
+            <a:r>
+              <a:rPr lang="en-US" altLang="zh-CN" dirty="0" err="1"/>
+              <a:t>a</a:t>
+            </a:r>
+            <a:r>
+              <a:rPr lang="en-US" altLang="zh-CN" dirty="0"/>
+              <a:t> class in the first line of this function. Then we add all of the necessary components in turns. The weight module will update the total weight during the flight mission, the second part for </a:t>
+            </a:r>
+            <a:r>
+              <a:rPr lang="en-US" altLang="zh-CN" dirty="0" err="1"/>
+              <a:t>base_analyses</a:t>
+            </a:r>
+            <a:r>
+              <a:rPr lang="en-US" altLang="zh-CN" dirty="0"/>
+              <a:t> function is most important, we choose the aerodynamic method in this part, in this case we just choose the </a:t>
+            </a:r>
+            <a:r>
+              <a:rPr lang="en-US" altLang="zh-CN" dirty="0" err="1"/>
+              <a:t>Fidelity_Zero</a:t>
+            </a:r>
+            <a:r>
+              <a:rPr lang="en-US" altLang="zh-CN" dirty="0"/>
+              <a:t>() module, because this module calculate quickly, is suitable for our class, you can just get results in several seconds. Now we add the energy module, the planet module and the atmosphere module into this function so that it can run correctly.</a:t>
+            </a:r>
+            <a:endParaRPr lang="zh-CN" altLang="en-US"/>
+          </a:p>
+          <a:p>
+            <a:endParaRPr lang="zh-CN" altLang="en-US"/>
           </a:p>
         </p:txBody>
       </p:sp>
       <p:sp>
         <p:nvSpPr>
-          <p:cNvPr id="4" name="灯片编号占位符 3">
-            <a:extLst>
-              <a:ext uri="{FF2B5EF4-FFF2-40B4-BE49-F238E27FC236}">
-                <a16:creationId xmlns:a16="http://schemas.microsoft.com/office/drawing/2014/main" id="{8021127B-505F-3B1A-2AAA-65DF92B51E67}"/>
-              </a:ext>
-            </a:extLst>
-          </p:cNvPr>
+          <p:cNvPr id="4" name="灯片编号占位符 3"/>
           <p:cNvSpPr>
             <a:spLocks noGrp="1"/>
           </p:cNvSpPr>
           <p:nvPr>
-            <p:ph type="sldNum" sz="quarter" idx="10"/>
+            <p:ph type="sldNum" sz="quarter" idx="5"/>
           </p:nvPr>
         </p:nvSpPr>
         <p:spPr/>
@@ -1829,7 +1984,7 @@
             <a:fld id="{DF1895BC-06EC-475A-97CA-BF53472F2E03}" type="slidenum">
               <a:rPr lang="de-DE" smtClean="0"/>
               <a:pPr/>
-              <a:t>37</a:t>
+              <a:t>9</a:t>
             </a:fld>
             <a:endParaRPr lang="de-DE" dirty="0"/>
           </a:p>
@@ -1838,7 +1993,7 @@
     </p:spTree>
     <p:extLst>
       <p:ext uri="{BB962C8B-B14F-4D97-AF65-F5344CB8AC3E}">
-        <p14:creationId xmlns:p14="http://schemas.microsoft.com/office/powerpoint/2010/main" val="1157948595"/>
+        <p14:creationId xmlns:p14="http://schemas.microsoft.com/office/powerpoint/2010/main" val="2868601985"/>
       </p:ext>
     </p:extLst>
   </p:cSld>

--- a/Design Conceptual Aircraft via SUAVE.pptx
+++ b/Design Conceptual Aircraft via SUAVE.pptx
@@ -930,13 +930,6 @@
           </p:nvPr>
         </p:nvSpPr>
         <p:spPr/>
-        <p:txBody>
-          <a:bodyPr/>
-          <a:lstStyle/>
-          <a:p>
-            <a:endParaRPr lang="zh-CN" altLang="en-US"/>
-          </a:p>
-        </p:txBody>
       </p:sp>
       <p:sp>
         <p:nvSpPr>
@@ -953,6 +946,70 @@
           <a:bodyPr/>
           <a:lstStyle/>
           <a:p>
+            <a:r>
+              <a:rPr lang="en-US" altLang="zh-CN" sz="1200" b="0" i="0" kern="1200" dirty="0">
+                <a:solidFill>
+                  <a:schemeClr val="tx1"/>
+                </a:solidFill>
+                <a:effectLst/>
+                <a:latin typeface="Arial" pitchFamily="34" charset="0"/>
+                <a:ea typeface="+mn-ea"/>
+                <a:cs typeface="+mn-cs"/>
+              </a:rPr>
+              <a:t>Normally, we’ll add the </a:t>
+            </a:r>
+            <a:r>
+              <a:rPr lang="en-US" altLang="zh-CN" sz="1200" b="0" i="0" kern="1200" dirty="0" err="1">
+                <a:solidFill>
+                  <a:schemeClr val="tx1"/>
+                </a:solidFill>
+                <a:effectLst/>
+                <a:latin typeface="Arial" pitchFamily="34" charset="0"/>
+                <a:ea typeface="+mn-ea"/>
+                <a:cs typeface="+mn-cs"/>
+              </a:rPr>
+              <a:t>base_analysis</a:t>
+            </a:r>
+            <a:r>
+              <a:rPr lang="en-US" altLang="zh-CN" sz="1200" b="0" i="0" kern="1200" dirty="0">
+                <a:solidFill>
+                  <a:schemeClr val="tx1"/>
+                </a:solidFill>
+                <a:effectLst/>
+                <a:latin typeface="Arial" pitchFamily="34" charset="0"/>
+                <a:ea typeface="+mn-ea"/>
+                <a:cs typeface="+mn-cs"/>
+              </a:rPr>
+              <a:t> function into a analysis container. This way, we can throw in multiple analysis modules inside it for different needs. For instance, we often need special settings for control surfaces during the takeoff phase. In today’s simple case, we’re only using one single module—the </a:t>
+            </a:r>
+            <a:r>
+              <a:rPr lang="en-US" altLang="zh-CN" sz="1200" b="0" i="0" kern="1200" dirty="0" err="1">
+                <a:solidFill>
+                  <a:schemeClr val="tx1"/>
+                </a:solidFill>
+                <a:effectLst/>
+                <a:latin typeface="Arial" pitchFamily="34" charset="0"/>
+                <a:ea typeface="+mn-ea"/>
+                <a:cs typeface="+mn-cs"/>
+              </a:rPr>
+              <a:t>base_analysis</a:t>
+            </a:r>
+            <a:r>
+              <a:rPr lang="en-US" altLang="zh-CN" sz="1200" b="0" i="0" kern="1200" dirty="0">
+                <a:solidFill>
+                  <a:schemeClr val="tx1"/>
+                </a:solidFill>
+                <a:effectLst/>
+                <a:latin typeface="Arial" pitchFamily="34" charset="0"/>
+                <a:ea typeface="+mn-ea"/>
+                <a:cs typeface="+mn-cs"/>
+              </a:rPr>
+              <a:t> we just built. Still, just to keep our code clean and fully structured, we’ll go ahead and make a container to hold it anyway.</a:t>
+            </a:r>
+            <a:r>
+              <a:rPr lang="en-US" altLang="zh-CN" dirty="0"/>
+              <a:t> Correspondingly, we turn the vehicle settings into a config class. Then we pass this config to our analysis, so it’s fully set up and ready to use.</a:t>
+            </a:r>
             <a:endParaRPr lang="zh-CN" altLang="en-US" dirty="0"/>
           </a:p>
         </p:txBody>
@@ -975,7 +1032,7 @@
             <a:fld id="{DF1895BC-06EC-475A-97CA-BF53472F2E03}" type="slidenum">
               <a:rPr lang="de-DE" smtClean="0"/>
               <a:pPr/>
-              <a:t>29</a:t>
+              <a:t>10</a:t>
             </a:fld>
             <a:endParaRPr lang="de-DE" dirty="0"/>
           </a:p>
@@ -984,7 +1041,7 @@
     </p:spTree>
     <p:extLst>
       <p:ext uri="{BB962C8B-B14F-4D97-AF65-F5344CB8AC3E}">
-        <p14:creationId xmlns:p14="http://schemas.microsoft.com/office/powerpoint/2010/main" val="4186176737"/>
+        <p14:creationId xmlns:p14="http://schemas.microsoft.com/office/powerpoint/2010/main" val="1522264340"/>
       </p:ext>
     </p:extLst>
   </p:cSld>
@@ -999,13 +1056,7 @@
   <p:cSld>
     <p:spTree>
       <p:nvGrpSpPr>
-        <p:cNvPr id="1" name="">
-          <a:extLst>
-            <a:ext uri="{FF2B5EF4-FFF2-40B4-BE49-F238E27FC236}">
-              <a16:creationId xmlns:a16="http://schemas.microsoft.com/office/drawing/2014/main" id="{8D36FB09-97AA-7E29-A45A-775B0F9F908E}"/>
-            </a:ext>
-          </a:extLst>
-        </p:cNvPr>
+        <p:cNvPr id="1" name=""/>
         <p:cNvGrpSpPr/>
         <p:nvPr/>
       </p:nvGrpSpPr>
@@ -1019,13 +1070,7 @@
       </p:grpSpPr>
       <p:sp>
         <p:nvSpPr>
-          <p:cNvPr id="2" name="幻灯片图像占位符 1">
-            <a:extLst>
-              <a:ext uri="{FF2B5EF4-FFF2-40B4-BE49-F238E27FC236}">
-                <a16:creationId xmlns:a16="http://schemas.microsoft.com/office/drawing/2014/main" id="{C080F85E-744A-3B8D-8811-4AD5135D7910}"/>
-              </a:ext>
-            </a:extLst>
-          </p:cNvPr>
+          <p:cNvPr id="2" name="幻灯片图像占位符 1"/>
           <p:cNvSpPr>
             <a:spLocks noGrp="1" noRot="1" noChangeAspect="1"/>
           </p:cNvSpPr>
@@ -1033,29 +1078,11 @@
             <p:ph type="sldImg"/>
           </p:nvPr>
         </p:nvSpPr>
-        <p:spPr>
-          <a:xfrm>
-            <a:off x="90488" y="744538"/>
-            <a:ext cx="6616700" cy="3722687"/>
-          </a:xfrm>
-        </p:spPr>
-        <p:txBody>
-          <a:bodyPr/>
-          <a:lstStyle/>
-          <a:p>
-            <a:endParaRPr lang="zh-CN" altLang="en-US"/>
-          </a:p>
-        </p:txBody>
+        <p:spPr/>
       </p:sp>
       <p:sp>
         <p:nvSpPr>
-          <p:cNvPr id="3" name="备注占位符 2">
-            <a:extLst>
-              <a:ext uri="{FF2B5EF4-FFF2-40B4-BE49-F238E27FC236}">
-                <a16:creationId xmlns:a16="http://schemas.microsoft.com/office/drawing/2014/main" id="{2494A4A5-24CF-5C2C-B6A3-5DE10E411098}"/>
-              </a:ext>
-            </a:extLst>
-          </p:cNvPr>
+          <p:cNvPr id="3" name="备注占位符 2"/>
           <p:cNvSpPr>
             <a:spLocks noGrp="1"/>
           </p:cNvSpPr>
@@ -1068,24 +1095,106 @@
           <a:bodyPr/>
           <a:lstStyle/>
           <a:p>
+            <a:r>
+              <a:rPr lang="en-US" altLang="zh-CN" dirty="0"/>
+              <a:t>Alright, great—our analysis framework is done. Now we’ll define the flight mission. Before the actual flight profile, we’ve got to input airport data first. Uh, you might think this is unnecessary—this part is mainly for special takeoff scenarios, like high‑altitude departures. For example, Xizang in China is super high above sea level. If you want to analyze a mission taking off from an airport there, you’d set the airport altitude to… let me check—around </a:t>
+            </a:r>
+            <a:r>
+              <a:rPr lang="en-US" altLang="zh-CN" sz="1200" b="1" kern="1200" dirty="0">
+                <a:solidFill>
+                  <a:schemeClr val="tx1"/>
+                </a:solidFill>
+                <a:effectLst/>
+                <a:latin typeface="Arial" pitchFamily="34" charset="0"/>
+                <a:ea typeface="+mn-ea"/>
+                <a:cs typeface="+mn-cs"/>
+              </a:rPr>
+              <a:t>4.3 km</a:t>
+            </a:r>
+            <a:r>
+              <a:rPr lang="en-US" altLang="zh-CN" dirty="0"/>
+              <a:t> for </a:t>
+            </a:r>
+            <a:r>
+              <a:rPr lang="en-US" altLang="zh-CN" dirty="0" err="1"/>
+              <a:t>Changdu</a:t>
+            </a:r>
+            <a:r>
+              <a:rPr lang="en-US" altLang="zh-CN" dirty="0"/>
+              <a:t> Bangda Airport, or about </a:t>
+            </a:r>
+            <a:r>
+              <a:rPr lang="en-US" altLang="zh-CN" sz="1200" b="1" kern="1200" dirty="0">
+                <a:solidFill>
+                  <a:schemeClr val="tx1"/>
+                </a:solidFill>
+                <a:effectLst/>
+                <a:latin typeface="Arial" pitchFamily="34" charset="0"/>
+                <a:ea typeface="+mn-ea"/>
+                <a:cs typeface="+mn-cs"/>
+              </a:rPr>
+              <a:t>3.6 km</a:t>
+            </a:r>
+            <a:r>
+              <a:rPr lang="en-US" altLang="zh-CN" dirty="0"/>
+              <a:t> for Lhasa </a:t>
+            </a:r>
+            <a:r>
+              <a:rPr lang="en-US" altLang="zh-CN" dirty="0" err="1"/>
+              <a:t>Gonggar</a:t>
+            </a:r>
+            <a:r>
+              <a:rPr lang="en-US" altLang="zh-CN" dirty="0"/>
+              <a:t> Airport.</a:t>
+            </a:r>
+            <a:r>
+              <a:rPr lang="en-GB" altLang="zh-CN" sz="1200" b="0" kern="1200" dirty="0">
+                <a:solidFill>
+                  <a:schemeClr val="tx1"/>
+                </a:solidFill>
+                <a:effectLst/>
+                <a:latin typeface="Arial" pitchFamily="34" charset="0"/>
+                <a:ea typeface="+mn-ea"/>
+                <a:cs typeface="+mn-cs"/>
+              </a:rPr>
+              <a:t> Alright, back on track. For our simple case, we’ll just go with the generic airport settings. That means zero altitude, standard temperature, and standard atmosphere. Quick note here: </a:t>
+            </a:r>
+            <a:r>
+              <a:rPr lang="en-GB" altLang="zh-CN" sz="1200" b="0" kern="1200" dirty="0" err="1">
+                <a:solidFill>
+                  <a:schemeClr val="tx1"/>
+                </a:solidFill>
+                <a:effectLst/>
+                <a:latin typeface="Arial" pitchFamily="34" charset="0"/>
+                <a:ea typeface="+mn-ea"/>
+                <a:cs typeface="+mn-cs"/>
+              </a:rPr>
+              <a:t>delta_isa</a:t>
+            </a:r>
+            <a:r>
+              <a:rPr lang="en-GB" altLang="zh-CN" sz="1200" b="0" kern="1200" dirty="0">
+                <a:solidFill>
+                  <a:schemeClr val="tx1"/>
+                </a:solidFill>
+                <a:effectLst/>
+                <a:latin typeface="Arial" pitchFamily="34" charset="0"/>
+                <a:ea typeface="+mn-ea"/>
+                <a:cs typeface="+mn-cs"/>
+              </a:rPr>
+              <a:t> refers to the temperature difference between the actual temperature of airport and the standard temperature.</a:t>
+            </a:r>
             <a:endParaRPr lang="zh-CN" altLang="en-US" dirty="0"/>
           </a:p>
         </p:txBody>
       </p:sp>
       <p:sp>
         <p:nvSpPr>
-          <p:cNvPr id="4" name="灯片编号占位符 3">
-            <a:extLst>
-              <a:ext uri="{FF2B5EF4-FFF2-40B4-BE49-F238E27FC236}">
-                <a16:creationId xmlns:a16="http://schemas.microsoft.com/office/drawing/2014/main" id="{8021127B-505F-3B1A-2AAA-65DF92B51E67}"/>
-              </a:ext>
-            </a:extLst>
-          </p:cNvPr>
+          <p:cNvPr id="4" name="灯片编号占位符 3"/>
           <p:cNvSpPr>
             <a:spLocks noGrp="1"/>
           </p:cNvSpPr>
           <p:nvPr>
-            <p:ph type="sldNum" sz="quarter" idx="10"/>
+            <p:ph type="sldNum" sz="quarter" idx="5"/>
           </p:nvPr>
         </p:nvSpPr>
         <p:spPr/>
@@ -1096,7 +1205,7 @@
             <a:fld id="{DF1895BC-06EC-475A-97CA-BF53472F2E03}" type="slidenum">
               <a:rPr lang="de-DE" smtClean="0"/>
               <a:pPr/>
-              <a:t>37</a:t>
+              <a:t>11</a:t>
             </a:fld>
             <a:endParaRPr lang="de-DE" dirty="0"/>
           </a:p>
@@ -1105,7 +1214,1103 @@
     </p:spTree>
     <p:extLst>
       <p:ext uri="{BB962C8B-B14F-4D97-AF65-F5344CB8AC3E}">
-        <p14:creationId xmlns:p14="http://schemas.microsoft.com/office/powerpoint/2010/main" val="1157948595"/>
+        <p14:creationId xmlns:p14="http://schemas.microsoft.com/office/powerpoint/2010/main" val="1192675679"/>
+      </p:ext>
+    </p:extLst>
+  </p:cSld>
+  <p:clrMapOvr>
+    <a:masterClrMapping/>
+  </p:clrMapOvr>
+</p:notes>
+</file>
+
+<file path=ppt/notesSlides/notesSlide12.xml><?xml version="1.0" encoding="utf-8"?>
+<p:notes xmlns:a="http://schemas.openxmlformats.org/drawingml/2006/main" xmlns:r="http://schemas.openxmlformats.org/officeDocument/2006/relationships" xmlns:p="http://schemas.openxmlformats.org/presentationml/2006/main">
+  <p:cSld>
+    <p:spTree>
+      <p:nvGrpSpPr>
+        <p:cNvPr id="1" name=""/>
+        <p:cNvGrpSpPr/>
+        <p:nvPr/>
+      </p:nvGrpSpPr>
+      <p:grpSpPr>
+        <a:xfrm>
+          <a:off x="0" y="0"/>
+          <a:ext cx="0" cy="0"/>
+          <a:chOff x="0" y="0"/>
+          <a:chExt cx="0" cy="0"/>
+        </a:xfrm>
+      </p:grpSpPr>
+      <p:sp>
+        <p:nvSpPr>
+          <p:cNvPr id="2" name="幻灯片图像占位符 1"/>
+          <p:cNvSpPr>
+            <a:spLocks noGrp="1" noRot="1" noChangeAspect="1"/>
+          </p:cNvSpPr>
+          <p:nvPr>
+            <p:ph type="sldImg"/>
+          </p:nvPr>
+        </p:nvSpPr>
+        <p:spPr/>
+      </p:sp>
+      <p:sp>
+        <p:nvSpPr>
+          <p:cNvPr id="3" name="备注占位符 2"/>
+          <p:cNvSpPr>
+            <a:spLocks noGrp="1"/>
+          </p:cNvSpPr>
+          <p:nvPr>
+            <p:ph type="body" idx="1"/>
+          </p:nvPr>
+        </p:nvSpPr>
+        <p:spPr/>
+        <p:txBody>
+          <a:bodyPr/>
+          <a:lstStyle/>
+          <a:p>
+            <a:pPr marL="0" marR="0" lvl="0" indent="0" algn="l" defTabSz="914400" rtl="0" eaLnBrk="1" fontAlgn="auto" latinLnBrk="0" hangingPunct="1">
+              <a:lnSpc>
+                <a:spcPct val="100000"/>
+              </a:lnSpc>
+              <a:spcBef>
+                <a:spcPts val="0"/>
+              </a:spcBef>
+              <a:spcAft>
+                <a:spcPts val="0"/>
+              </a:spcAft>
+              <a:buClrTx/>
+              <a:buSzTx/>
+              <a:buFontTx/>
+              <a:buNone/>
+              <a:tabLst/>
+              <a:defRPr/>
+            </a:pPr>
+            <a:r>
+              <a:rPr lang="en-US" altLang="zh-CN" dirty="0"/>
+              <a:t>First, let’s define the takeoff segment. It’s really simple. We just need to set the </a:t>
+            </a:r>
+            <a:r>
+              <a:rPr lang="en-US" altLang="zh-CN" dirty="0" err="1"/>
+              <a:t>altitude_start</a:t>
+            </a:r>
+            <a:r>
+              <a:rPr lang="en-US" altLang="zh-CN" dirty="0"/>
+              <a:t>, </a:t>
+            </a:r>
+            <a:r>
+              <a:rPr lang="en-US" altLang="zh-CN" dirty="0" err="1"/>
+              <a:t>altitude_end</a:t>
+            </a:r>
+            <a:r>
+              <a:rPr lang="en-US" altLang="zh-CN" dirty="0"/>
+              <a:t>, climb </a:t>
+            </a:r>
+            <a:r>
+              <a:rPr lang="en-US" altLang="zh-CN" dirty="0" err="1"/>
+              <a:t>air_speed</a:t>
+            </a:r>
+            <a:r>
+              <a:rPr lang="en-US" altLang="zh-CN" dirty="0"/>
+              <a:t>, and </a:t>
+            </a:r>
+            <a:r>
+              <a:rPr lang="en-US" altLang="zh-CN" dirty="0" err="1"/>
+              <a:t>climb_rate</a:t>
+            </a:r>
+            <a:r>
+              <a:rPr lang="en-US" altLang="zh-CN" dirty="0"/>
+              <a:t>. Every flight segment we use is built based on a basic Segment class, we should create the base class in advance.</a:t>
+            </a:r>
+            <a:r>
+              <a:rPr lang="zh-CN" altLang="en-US" dirty="0"/>
+              <a:t> </a:t>
+            </a:r>
+            <a:r>
+              <a:rPr lang="en-US" altLang="zh-CN" dirty="0"/>
+              <a:t>By</a:t>
+            </a:r>
+            <a:r>
+              <a:rPr lang="zh-CN" altLang="en-US" dirty="0"/>
+              <a:t> </a:t>
+            </a:r>
+            <a:r>
+              <a:rPr lang="en-US" altLang="zh-CN" dirty="0"/>
+              <a:t>the</a:t>
+            </a:r>
+            <a:r>
+              <a:rPr lang="zh-CN" altLang="en-US" dirty="0"/>
+              <a:t> </a:t>
+            </a:r>
+            <a:r>
+              <a:rPr lang="en-US" altLang="zh-CN" dirty="0"/>
+              <a:t>way, most of the parameters in our simple case come from the Boeing 737 test case, and a few are set based on my own experience. You can adjust most of these values freely, as long as they stay reasonable and realistic. And after we define a mission segment, please remember to add this segment into the mission.</a:t>
+            </a:r>
+            <a:endParaRPr lang="zh-CN" altLang="en-US" dirty="0"/>
+          </a:p>
+        </p:txBody>
+      </p:sp>
+      <p:sp>
+        <p:nvSpPr>
+          <p:cNvPr id="4" name="灯片编号占位符 3"/>
+          <p:cNvSpPr>
+            <a:spLocks noGrp="1"/>
+          </p:cNvSpPr>
+          <p:nvPr>
+            <p:ph type="sldNum" sz="quarter" idx="5"/>
+          </p:nvPr>
+        </p:nvSpPr>
+        <p:spPr/>
+        <p:txBody>
+          <a:bodyPr/>
+          <a:lstStyle/>
+          <a:p>
+            <a:fld id="{DF1895BC-06EC-475A-97CA-BF53472F2E03}" type="slidenum">
+              <a:rPr lang="de-DE" smtClean="0"/>
+              <a:pPr/>
+              <a:t>12</a:t>
+            </a:fld>
+            <a:endParaRPr lang="de-DE" dirty="0"/>
+          </a:p>
+        </p:txBody>
+      </p:sp>
+    </p:spTree>
+    <p:extLst>
+      <p:ext uri="{BB962C8B-B14F-4D97-AF65-F5344CB8AC3E}">
+        <p14:creationId xmlns:p14="http://schemas.microsoft.com/office/powerpoint/2010/main" val="1815023243"/>
+      </p:ext>
+    </p:extLst>
+  </p:cSld>
+  <p:clrMapOvr>
+    <a:masterClrMapping/>
+  </p:clrMapOvr>
+</p:notes>
+</file>
+
+<file path=ppt/notesSlides/notesSlide13.xml><?xml version="1.0" encoding="utf-8"?>
+<p:notes xmlns:a="http://schemas.openxmlformats.org/drawingml/2006/main" xmlns:r="http://schemas.openxmlformats.org/officeDocument/2006/relationships" xmlns:p="http://schemas.openxmlformats.org/presentationml/2006/main">
+  <p:cSld>
+    <p:spTree>
+      <p:nvGrpSpPr>
+        <p:cNvPr id="1" name=""/>
+        <p:cNvGrpSpPr/>
+        <p:nvPr/>
+      </p:nvGrpSpPr>
+      <p:grpSpPr>
+        <a:xfrm>
+          <a:off x="0" y="0"/>
+          <a:ext cx="0" cy="0"/>
+          <a:chOff x="0" y="0"/>
+          <a:chExt cx="0" cy="0"/>
+        </a:xfrm>
+      </p:grpSpPr>
+      <p:sp>
+        <p:nvSpPr>
+          <p:cNvPr id="2" name="幻灯片图像占位符 1"/>
+          <p:cNvSpPr>
+            <a:spLocks noGrp="1" noRot="1" noChangeAspect="1"/>
+          </p:cNvSpPr>
+          <p:nvPr>
+            <p:ph type="sldImg"/>
+          </p:nvPr>
+        </p:nvSpPr>
+        <p:spPr/>
+      </p:sp>
+      <p:sp>
+        <p:nvSpPr>
+          <p:cNvPr id="3" name="备注占位符 2"/>
+          <p:cNvSpPr>
+            <a:spLocks noGrp="1"/>
+          </p:cNvSpPr>
+          <p:nvPr>
+            <p:ph type="body" idx="1"/>
+          </p:nvPr>
+        </p:nvSpPr>
+        <p:spPr/>
+        <p:txBody>
+          <a:bodyPr/>
+          <a:lstStyle/>
+          <a:p>
+            <a:r>
+              <a:rPr lang="en-US" altLang="zh-CN" dirty="0"/>
+              <a:t>Then we move on to the cruise phase. 230 meters per second equals about Mach 0.8, a common setting for civil transport aircraft. But maybe in the near future, we’ll be flying on faster supersonic transport. Mach 1.3? Or 1.6, or Mach 2! Sorry let’s get back the point. The second parameter here is our cruise range. Attention, the units of range is not kilometer but </a:t>
+            </a:r>
+            <a:r>
+              <a:rPr lang="en-US" altLang="zh-CN" dirty="0" err="1"/>
+              <a:t>nautical_miles</a:t>
+            </a:r>
+            <a:r>
+              <a:rPr lang="en-US" altLang="zh-CN" dirty="0"/>
+              <a:t>. You know what? For me, the Units function is most impressive feature in SUAVE—like, in my own codes, I always use International System of units by default, and yeah, that’s convenient, saves time and keeps the code simple, but here’s the thing: once you start piling up tons of parameters, it’s super easy to lose track of what unit each one uses, because I can’t really be sure I’ve use SI units everywhere. But in the SUAVE, since the Units module, you can use any units you like, the only thing you need to do is just mark the units after value like this simple case. When the SUAVE </a:t>
+            </a:r>
+            <a:r>
+              <a:rPr lang="en-US" altLang="zh-CN" dirty="0" err="1"/>
+              <a:t>excute</a:t>
+            </a:r>
+            <a:r>
+              <a:rPr lang="en-US" altLang="zh-CN" dirty="0"/>
+              <a:t> it will transform all value into the same units system automatically. I think this is a really clever coding concept worth learning from. Alright back to our simple case, now we have define the cruise segment, don’t forget to add it in mission.</a:t>
+            </a:r>
+            <a:endParaRPr lang="zh-CN" altLang="en-US" dirty="0"/>
+          </a:p>
+        </p:txBody>
+      </p:sp>
+      <p:sp>
+        <p:nvSpPr>
+          <p:cNvPr id="4" name="灯片编号占位符 3"/>
+          <p:cNvSpPr>
+            <a:spLocks noGrp="1"/>
+          </p:cNvSpPr>
+          <p:nvPr>
+            <p:ph type="sldNum" sz="quarter" idx="5"/>
+          </p:nvPr>
+        </p:nvSpPr>
+        <p:spPr/>
+        <p:txBody>
+          <a:bodyPr/>
+          <a:lstStyle/>
+          <a:p>
+            <a:fld id="{DF1895BC-06EC-475A-97CA-BF53472F2E03}" type="slidenum">
+              <a:rPr lang="de-DE" smtClean="0"/>
+              <a:pPr/>
+              <a:t>13</a:t>
+            </a:fld>
+            <a:endParaRPr lang="de-DE" dirty="0"/>
+          </a:p>
+        </p:txBody>
+      </p:sp>
+    </p:spTree>
+    <p:extLst>
+      <p:ext uri="{BB962C8B-B14F-4D97-AF65-F5344CB8AC3E}">
+        <p14:creationId xmlns:p14="http://schemas.microsoft.com/office/powerpoint/2010/main" val="2336232180"/>
+      </p:ext>
+    </p:extLst>
+  </p:cSld>
+  <p:clrMapOvr>
+    <a:masterClrMapping/>
+  </p:clrMapOvr>
+</p:notes>
+</file>
+
+<file path=ppt/notesSlides/notesSlide14.xml><?xml version="1.0" encoding="utf-8"?>
+<p:notes xmlns:a="http://schemas.openxmlformats.org/drawingml/2006/main" xmlns:r="http://schemas.openxmlformats.org/officeDocument/2006/relationships" xmlns:p="http://schemas.openxmlformats.org/presentationml/2006/main">
+  <p:cSld>
+    <p:spTree>
+      <p:nvGrpSpPr>
+        <p:cNvPr id="1" name=""/>
+        <p:cNvGrpSpPr/>
+        <p:nvPr/>
+      </p:nvGrpSpPr>
+      <p:grpSpPr>
+        <a:xfrm>
+          <a:off x="0" y="0"/>
+          <a:ext cx="0" cy="0"/>
+          <a:chOff x="0" y="0"/>
+          <a:chExt cx="0" cy="0"/>
+        </a:xfrm>
+      </p:grpSpPr>
+      <p:sp>
+        <p:nvSpPr>
+          <p:cNvPr id="2" name="幻灯片图像占位符 1"/>
+          <p:cNvSpPr>
+            <a:spLocks noGrp="1" noRot="1" noChangeAspect="1"/>
+          </p:cNvSpPr>
+          <p:nvPr>
+            <p:ph type="sldImg"/>
+          </p:nvPr>
+        </p:nvSpPr>
+        <p:spPr/>
+      </p:sp>
+      <p:sp>
+        <p:nvSpPr>
+          <p:cNvPr id="3" name="备注占位符 2"/>
+          <p:cNvSpPr>
+            <a:spLocks noGrp="1"/>
+          </p:cNvSpPr>
+          <p:nvPr>
+            <p:ph type="body" idx="1"/>
+          </p:nvPr>
+        </p:nvSpPr>
+        <p:spPr/>
+        <p:txBody>
+          <a:bodyPr/>
+          <a:lstStyle/>
+          <a:p>
+            <a:r>
+              <a:rPr lang="en-US" altLang="zh-CN" sz="1200" b="0" i="0" kern="1200" dirty="0">
+                <a:solidFill>
+                  <a:schemeClr val="tx1"/>
+                </a:solidFill>
+                <a:effectLst/>
+                <a:latin typeface="Arial" pitchFamily="34" charset="0"/>
+                <a:ea typeface="+mn-ea"/>
+                <a:cs typeface="+mn-cs"/>
+              </a:rPr>
+              <a:t>Next up is the descent segment. We just set the </a:t>
+            </a:r>
+            <a:r>
+              <a:rPr lang="en-US" altLang="zh-CN" sz="1200" b="0" i="0" kern="1200" dirty="0" err="1">
+                <a:solidFill>
+                  <a:schemeClr val="tx1"/>
+                </a:solidFill>
+                <a:effectLst/>
+                <a:latin typeface="Arial" pitchFamily="34" charset="0"/>
+                <a:ea typeface="+mn-ea"/>
+                <a:cs typeface="+mn-cs"/>
+              </a:rPr>
+              <a:t>altitude_end</a:t>
+            </a:r>
+            <a:r>
+              <a:rPr lang="en-US" altLang="zh-CN" sz="1200" b="0" i="0" kern="1200" dirty="0">
+                <a:solidFill>
+                  <a:schemeClr val="tx1"/>
+                </a:solidFill>
+                <a:effectLst/>
+                <a:latin typeface="Arial" pitchFamily="34" charset="0"/>
+                <a:ea typeface="+mn-ea"/>
+                <a:cs typeface="+mn-cs"/>
+              </a:rPr>
+              <a:t>, descent airspeed and </a:t>
+            </a:r>
+            <a:r>
+              <a:rPr lang="en-US" altLang="zh-CN" sz="1200" b="0" i="0" kern="1200" dirty="0" err="1">
+                <a:solidFill>
+                  <a:schemeClr val="tx1"/>
+                </a:solidFill>
+                <a:effectLst/>
+                <a:latin typeface="Arial" pitchFamily="34" charset="0"/>
+                <a:ea typeface="+mn-ea"/>
+                <a:cs typeface="+mn-cs"/>
+              </a:rPr>
+              <a:t>descent_rate</a:t>
+            </a:r>
+            <a:r>
+              <a:rPr lang="en-US" altLang="zh-CN" sz="1200" b="0" i="0" kern="1200" dirty="0">
+                <a:solidFill>
+                  <a:schemeClr val="tx1"/>
+                </a:solidFill>
+                <a:effectLst/>
+                <a:latin typeface="Arial" pitchFamily="34" charset="0"/>
+                <a:ea typeface="+mn-ea"/>
+                <a:cs typeface="+mn-cs"/>
+              </a:rPr>
+              <a:t> here, then add it to the mission. And don’t forget to return the mission class at the end. You might’ve noticed that, unlike the takeoff </a:t>
+            </a:r>
+            <a:r>
+              <a:rPr lang="en-US" altLang="zh-CN" sz="1200" b="0" i="0" kern="1200" dirty="0" err="1">
+                <a:solidFill>
+                  <a:schemeClr val="tx1"/>
+                </a:solidFill>
+                <a:effectLst/>
+                <a:latin typeface="Arial" pitchFamily="34" charset="0"/>
+                <a:ea typeface="+mn-ea"/>
+                <a:cs typeface="+mn-cs"/>
+              </a:rPr>
+              <a:t>segement</a:t>
+            </a:r>
+            <a:r>
+              <a:rPr lang="en-US" altLang="zh-CN" sz="1200" b="0" i="0" kern="1200" dirty="0">
+                <a:solidFill>
+                  <a:schemeClr val="tx1"/>
+                </a:solidFill>
+                <a:effectLst/>
+                <a:latin typeface="Arial" pitchFamily="34" charset="0"/>
+                <a:ea typeface="+mn-ea"/>
+                <a:cs typeface="+mn-cs"/>
+              </a:rPr>
+              <a:t>, we didn’t set a </a:t>
+            </a:r>
+            <a:r>
+              <a:rPr lang="en-US" altLang="zh-CN" sz="1200" b="0" i="0" kern="1200" dirty="0" err="1">
+                <a:solidFill>
+                  <a:schemeClr val="tx1"/>
+                </a:solidFill>
+                <a:effectLst/>
+                <a:latin typeface="Arial" pitchFamily="34" charset="0"/>
+                <a:ea typeface="+mn-ea"/>
+                <a:cs typeface="+mn-cs"/>
+              </a:rPr>
+              <a:t>altitude_start</a:t>
+            </a:r>
+            <a:r>
+              <a:rPr lang="en-US" altLang="zh-CN" sz="1200" b="0" i="0" kern="1200" dirty="0">
+                <a:solidFill>
+                  <a:schemeClr val="tx1"/>
+                </a:solidFill>
+                <a:effectLst/>
+                <a:latin typeface="Arial" pitchFamily="34" charset="0"/>
+                <a:ea typeface="+mn-ea"/>
+                <a:cs typeface="+mn-cs"/>
+              </a:rPr>
+              <a:t> here. Because the SUAVE will automatically take the ending altitude of the previous segment as the starting point for the next one, to keep the flight mission consistent. So we just need to set the </a:t>
+            </a:r>
+            <a:r>
+              <a:rPr lang="en-US" altLang="zh-CN" sz="1200" b="0" i="0" kern="1200" dirty="0" err="1">
+                <a:solidFill>
+                  <a:schemeClr val="tx1"/>
+                </a:solidFill>
+                <a:effectLst/>
+                <a:latin typeface="Arial" pitchFamily="34" charset="0"/>
+                <a:ea typeface="+mn-ea"/>
+                <a:cs typeface="+mn-cs"/>
+              </a:rPr>
+              <a:t>altitude_start</a:t>
+            </a:r>
+            <a:r>
+              <a:rPr lang="en-US" altLang="zh-CN" sz="1200" b="0" i="0" kern="1200" dirty="0">
+                <a:solidFill>
+                  <a:schemeClr val="tx1"/>
+                </a:solidFill>
+                <a:effectLst/>
+                <a:latin typeface="Arial" pitchFamily="34" charset="0"/>
+                <a:ea typeface="+mn-ea"/>
+                <a:cs typeface="+mn-cs"/>
+              </a:rPr>
+              <a:t> in the first segment.</a:t>
+            </a:r>
+            <a:endParaRPr lang="zh-CN" altLang="en-US" dirty="0"/>
+          </a:p>
+        </p:txBody>
+      </p:sp>
+      <p:sp>
+        <p:nvSpPr>
+          <p:cNvPr id="4" name="灯片编号占位符 3"/>
+          <p:cNvSpPr>
+            <a:spLocks noGrp="1"/>
+          </p:cNvSpPr>
+          <p:nvPr>
+            <p:ph type="sldNum" sz="quarter" idx="5"/>
+          </p:nvPr>
+        </p:nvSpPr>
+        <p:spPr/>
+        <p:txBody>
+          <a:bodyPr/>
+          <a:lstStyle/>
+          <a:p>
+            <a:fld id="{DF1895BC-06EC-475A-97CA-BF53472F2E03}" type="slidenum">
+              <a:rPr lang="de-DE" smtClean="0"/>
+              <a:pPr/>
+              <a:t>14</a:t>
+            </a:fld>
+            <a:endParaRPr lang="de-DE" dirty="0"/>
+          </a:p>
+        </p:txBody>
+      </p:sp>
+    </p:spTree>
+    <p:extLst>
+      <p:ext uri="{BB962C8B-B14F-4D97-AF65-F5344CB8AC3E}">
+        <p14:creationId xmlns:p14="http://schemas.microsoft.com/office/powerpoint/2010/main" val="3289766096"/>
+      </p:ext>
+    </p:extLst>
+  </p:cSld>
+  <p:clrMapOvr>
+    <a:masterClrMapping/>
+  </p:clrMapOvr>
+</p:notes>
+</file>
+
+<file path=ppt/notesSlides/notesSlide15.xml><?xml version="1.0" encoding="utf-8"?>
+<p:notes xmlns:a="http://schemas.openxmlformats.org/drawingml/2006/main" xmlns:r="http://schemas.openxmlformats.org/officeDocument/2006/relationships" xmlns:p="http://schemas.openxmlformats.org/presentationml/2006/main">
+  <p:cSld>
+    <p:spTree>
+      <p:nvGrpSpPr>
+        <p:cNvPr id="1" name=""/>
+        <p:cNvGrpSpPr/>
+        <p:nvPr/>
+      </p:nvGrpSpPr>
+      <p:grpSpPr>
+        <a:xfrm>
+          <a:off x="0" y="0"/>
+          <a:ext cx="0" cy="0"/>
+          <a:chOff x="0" y="0"/>
+          <a:chExt cx="0" cy="0"/>
+        </a:xfrm>
+      </p:grpSpPr>
+      <p:sp>
+        <p:nvSpPr>
+          <p:cNvPr id="2" name="幻灯片图像占位符 1"/>
+          <p:cNvSpPr>
+            <a:spLocks noGrp="1" noRot="1" noChangeAspect="1"/>
+          </p:cNvSpPr>
+          <p:nvPr>
+            <p:ph type="sldImg"/>
+          </p:nvPr>
+        </p:nvSpPr>
+        <p:spPr/>
+      </p:sp>
+      <p:sp>
+        <p:nvSpPr>
+          <p:cNvPr id="3" name="备注占位符 2"/>
+          <p:cNvSpPr>
+            <a:spLocks noGrp="1"/>
+          </p:cNvSpPr>
+          <p:nvPr>
+            <p:ph type="body" idx="1"/>
+          </p:nvPr>
+        </p:nvSpPr>
+        <p:spPr/>
+        <p:txBody>
+          <a:bodyPr/>
+          <a:lstStyle/>
+          <a:p>
+            <a:r>
+              <a:rPr lang="en-US" altLang="zh-CN" sz="1200" b="0" i="0" kern="1200" dirty="0">
+                <a:solidFill>
+                  <a:schemeClr val="tx1"/>
+                </a:solidFill>
+                <a:effectLst/>
+                <a:latin typeface="Arial" pitchFamily="34" charset="0"/>
+                <a:ea typeface="+mn-ea"/>
+                <a:cs typeface="+mn-cs"/>
+              </a:rPr>
+              <a:t>Great, now we’re finally getting to the most important part — building our aircraft. First, we’ll lay out a few general parameters for the aircraft, then set up the geometry for every single component. Last class, Dr. Chen mentioned how the creator of </a:t>
+            </a:r>
+            <a:r>
+              <a:rPr lang="en-US" altLang="zh-CN" sz="1200" b="0" i="0" kern="1200" dirty="0" err="1">
+                <a:solidFill>
+                  <a:schemeClr val="tx1"/>
+                </a:solidFill>
+                <a:effectLst/>
+                <a:latin typeface="Arial" pitchFamily="34" charset="0"/>
+                <a:ea typeface="+mn-ea"/>
+                <a:cs typeface="+mn-cs"/>
+              </a:rPr>
+              <a:t>OpenVSP</a:t>
+            </a:r>
+            <a:r>
+              <a:rPr lang="en-US" altLang="zh-CN" sz="1200" b="0" i="0" kern="1200" dirty="0">
+                <a:solidFill>
+                  <a:schemeClr val="tx1"/>
+                </a:solidFill>
+                <a:effectLst/>
+                <a:latin typeface="Arial" pitchFamily="34" charset="0"/>
+                <a:ea typeface="+mn-ea"/>
+                <a:cs typeface="+mn-cs"/>
+              </a:rPr>
+              <a:t> first sketched an aircraft on a napkin. Today, we’re basically </a:t>
+            </a:r>
+            <a:r>
+              <a:rPr lang="en-US" altLang="zh-CN" sz="1200" b="0" i="0" kern="1200" dirty="0" err="1">
+                <a:solidFill>
+                  <a:schemeClr val="tx1"/>
+                </a:solidFill>
+                <a:effectLst/>
+                <a:latin typeface="Arial" pitchFamily="34" charset="0"/>
+                <a:ea typeface="+mn-ea"/>
+                <a:cs typeface="+mn-cs"/>
+              </a:rPr>
+              <a:t>gonna</a:t>
+            </a:r>
+            <a:r>
+              <a:rPr lang="en-US" altLang="zh-CN" sz="1200" b="0" i="0" kern="1200" dirty="0">
+                <a:solidFill>
+                  <a:schemeClr val="tx1"/>
+                </a:solidFill>
+                <a:effectLst/>
+                <a:latin typeface="Arial" pitchFamily="34" charset="0"/>
+                <a:ea typeface="+mn-ea"/>
+                <a:cs typeface="+mn-cs"/>
+              </a:rPr>
+              <a:t> draw our own aircraft, but with code instead. Like I said before, most of the parameters is from the Boeing 737 test case, in this part we define the </a:t>
+            </a:r>
+            <a:r>
+              <a:rPr lang="en-US" altLang="zh-CN" sz="1200" b="0" i="0" kern="1200" dirty="0" err="1">
+                <a:solidFill>
+                  <a:schemeClr val="tx1"/>
+                </a:solidFill>
+                <a:effectLst/>
+                <a:latin typeface="Arial" pitchFamily="34" charset="0"/>
+                <a:ea typeface="+mn-ea"/>
+                <a:cs typeface="+mn-cs"/>
+              </a:rPr>
+              <a:t>max_takeoff</a:t>
+            </a:r>
+            <a:r>
+              <a:rPr lang="en-US" altLang="zh-CN" sz="1200" b="0" i="0" kern="1200" dirty="0">
+                <a:solidFill>
+                  <a:schemeClr val="tx1"/>
+                </a:solidFill>
+                <a:effectLst/>
+                <a:latin typeface="Arial" pitchFamily="34" charset="0"/>
+                <a:ea typeface="+mn-ea"/>
+                <a:cs typeface="+mn-cs"/>
+              </a:rPr>
+              <a:t> weight</a:t>
+            </a:r>
+            <a:endParaRPr lang="zh-CN" altLang="en-US" dirty="0"/>
+          </a:p>
+        </p:txBody>
+      </p:sp>
+      <p:sp>
+        <p:nvSpPr>
+          <p:cNvPr id="4" name="灯片编号占位符 3"/>
+          <p:cNvSpPr>
+            <a:spLocks noGrp="1"/>
+          </p:cNvSpPr>
+          <p:nvPr>
+            <p:ph type="sldNum" sz="quarter" idx="5"/>
+          </p:nvPr>
+        </p:nvSpPr>
+        <p:spPr/>
+        <p:txBody>
+          <a:bodyPr/>
+          <a:lstStyle/>
+          <a:p>
+            <a:fld id="{DF1895BC-06EC-475A-97CA-BF53472F2E03}" type="slidenum">
+              <a:rPr lang="de-DE" smtClean="0"/>
+              <a:pPr/>
+              <a:t>15</a:t>
+            </a:fld>
+            <a:endParaRPr lang="de-DE" dirty="0"/>
+          </a:p>
+        </p:txBody>
+      </p:sp>
+    </p:spTree>
+    <p:extLst>
+      <p:ext uri="{BB962C8B-B14F-4D97-AF65-F5344CB8AC3E}">
+        <p14:creationId xmlns:p14="http://schemas.microsoft.com/office/powerpoint/2010/main" val="465917973"/>
+      </p:ext>
+    </p:extLst>
+  </p:cSld>
+  <p:clrMapOvr>
+    <a:masterClrMapping/>
+  </p:clrMapOvr>
+</p:notes>
+</file>
+
+<file path=ppt/notesSlides/notesSlide16.xml><?xml version="1.0" encoding="utf-8"?>
+<p:notes xmlns:a="http://schemas.openxmlformats.org/drawingml/2006/main" xmlns:r="http://schemas.openxmlformats.org/officeDocument/2006/relationships" xmlns:p="http://schemas.openxmlformats.org/presentationml/2006/main">
+  <p:cSld>
+    <p:spTree>
+      <p:nvGrpSpPr>
+        <p:cNvPr id="1" name=""/>
+        <p:cNvGrpSpPr/>
+        <p:nvPr/>
+      </p:nvGrpSpPr>
+      <p:grpSpPr>
+        <a:xfrm>
+          <a:off x="0" y="0"/>
+          <a:ext cx="0" cy="0"/>
+          <a:chOff x="0" y="0"/>
+          <a:chExt cx="0" cy="0"/>
+        </a:xfrm>
+      </p:grpSpPr>
+      <p:sp>
+        <p:nvSpPr>
+          <p:cNvPr id="2" name="幻灯片图像占位符 1"/>
+          <p:cNvSpPr>
+            <a:spLocks noGrp="1" noRot="1" noChangeAspect="1"/>
+          </p:cNvSpPr>
+          <p:nvPr>
+            <p:ph type="sldImg"/>
+          </p:nvPr>
+        </p:nvSpPr>
+        <p:spPr/>
+      </p:sp>
+      <p:sp>
+        <p:nvSpPr>
+          <p:cNvPr id="3" name="备注占位符 2"/>
+          <p:cNvSpPr>
+            <a:spLocks noGrp="1"/>
+          </p:cNvSpPr>
+          <p:nvPr>
+            <p:ph type="body" idx="1"/>
+          </p:nvPr>
+        </p:nvSpPr>
+        <p:spPr/>
+        <p:txBody>
+          <a:bodyPr/>
+          <a:lstStyle/>
+          <a:p>
+            <a:r>
+              <a:rPr lang="en-US" altLang="zh-CN" dirty="0"/>
+              <a:t>Then we define the </a:t>
+            </a:r>
+            <a:r>
+              <a:rPr lang="en-US" altLang="zh-CN" dirty="0" err="1"/>
+              <a:t>main_wing</a:t>
+            </a:r>
+            <a:r>
+              <a:rPr lang="en-US" altLang="zh-CN" dirty="0"/>
+              <a:t>,</a:t>
+            </a:r>
+            <a:r>
+              <a:rPr lang="zh-CN" altLang="en-US" dirty="0"/>
+              <a:t> </a:t>
+            </a:r>
+            <a:r>
+              <a:rPr lang="en-US" altLang="zh-CN" dirty="0"/>
+              <a:t>I</a:t>
+            </a:r>
+            <a:r>
+              <a:rPr lang="zh-CN" altLang="en-US" dirty="0"/>
+              <a:t> </a:t>
+            </a:r>
+            <a:r>
+              <a:rPr lang="en-US" altLang="zh-CN" dirty="0"/>
+              <a:t>have</a:t>
+            </a:r>
+            <a:r>
+              <a:rPr lang="zh-CN" altLang="en-US" dirty="0"/>
+              <a:t> </a:t>
+            </a:r>
+            <a:r>
+              <a:rPr lang="en-US" altLang="zh-CN" dirty="0"/>
+              <a:t>emphasis the </a:t>
+            </a:r>
+            <a:r>
+              <a:rPr lang="en-US" altLang="zh-CN" dirty="0" err="1"/>
+              <a:t>main_wing</a:t>
+            </a:r>
+            <a:r>
+              <a:rPr lang="en-US" altLang="zh-CN" dirty="0"/>
+              <a:t> in the picture. And after define the </a:t>
+            </a:r>
+            <a:r>
+              <a:rPr lang="en-US" altLang="zh-CN" dirty="0" err="1"/>
+              <a:t>main_wing</a:t>
+            </a:r>
+            <a:r>
+              <a:rPr lang="en-US" altLang="zh-CN" dirty="0"/>
+              <a:t> just remember to add it in vehicle class.</a:t>
+            </a:r>
+          </a:p>
+        </p:txBody>
+      </p:sp>
+      <p:sp>
+        <p:nvSpPr>
+          <p:cNvPr id="4" name="灯片编号占位符 3"/>
+          <p:cNvSpPr>
+            <a:spLocks noGrp="1"/>
+          </p:cNvSpPr>
+          <p:nvPr>
+            <p:ph type="sldNum" sz="quarter" idx="5"/>
+          </p:nvPr>
+        </p:nvSpPr>
+        <p:spPr/>
+        <p:txBody>
+          <a:bodyPr/>
+          <a:lstStyle/>
+          <a:p>
+            <a:fld id="{DF1895BC-06EC-475A-97CA-BF53472F2E03}" type="slidenum">
+              <a:rPr lang="de-DE" smtClean="0"/>
+              <a:pPr/>
+              <a:t>16</a:t>
+            </a:fld>
+            <a:endParaRPr lang="de-DE" dirty="0"/>
+          </a:p>
+        </p:txBody>
+      </p:sp>
+    </p:spTree>
+    <p:extLst>
+      <p:ext uri="{BB962C8B-B14F-4D97-AF65-F5344CB8AC3E}">
+        <p14:creationId xmlns:p14="http://schemas.microsoft.com/office/powerpoint/2010/main" val="3397905936"/>
+      </p:ext>
+    </p:extLst>
+  </p:cSld>
+  <p:clrMapOvr>
+    <a:masterClrMapping/>
+  </p:clrMapOvr>
+</p:notes>
+</file>
+
+<file path=ppt/notesSlides/notesSlide17.xml><?xml version="1.0" encoding="utf-8"?>
+<p:notes xmlns:a="http://schemas.openxmlformats.org/drawingml/2006/main" xmlns:r="http://schemas.openxmlformats.org/officeDocument/2006/relationships" xmlns:p="http://schemas.openxmlformats.org/presentationml/2006/main">
+  <p:cSld>
+    <p:spTree>
+      <p:nvGrpSpPr>
+        <p:cNvPr id="1" name=""/>
+        <p:cNvGrpSpPr/>
+        <p:nvPr/>
+      </p:nvGrpSpPr>
+      <p:grpSpPr>
+        <a:xfrm>
+          <a:off x="0" y="0"/>
+          <a:ext cx="0" cy="0"/>
+          <a:chOff x="0" y="0"/>
+          <a:chExt cx="0" cy="0"/>
+        </a:xfrm>
+      </p:grpSpPr>
+      <p:sp>
+        <p:nvSpPr>
+          <p:cNvPr id="2" name="幻灯片图像占位符 1"/>
+          <p:cNvSpPr>
+            <a:spLocks noGrp="1" noRot="1" noChangeAspect="1"/>
+          </p:cNvSpPr>
+          <p:nvPr>
+            <p:ph type="sldImg"/>
+          </p:nvPr>
+        </p:nvSpPr>
+        <p:spPr/>
+      </p:sp>
+      <p:sp>
+        <p:nvSpPr>
+          <p:cNvPr id="3" name="备注占位符 2"/>
+          <p:cNvSpPr>
+            <a:spLocks noGrp="1"/>
+          </p:cNvSpPr>
+          <p:nvPr>
+            <p:ph type="body" idx="1"/>
+          </p:nvPr>
+        </p:nvSpPr>
+        <p:spPr/>
+        <p:txBody>
+          <a:bodyPr/>
+          <a:lstStyle/>
+          <a:p>
+            <a:r>
+              <a:rPr lang="en-US" altLang="zh-CN" sz="1200" b="0" i="0" kern="1200" dirty="0">
+                <a:solidFill>
+                  <a:schemeClr val="tx1"/>
+                </a:solidFill>
+                <a:effectLst/>
+                <a:latin typeface="Arial" pitchFamily="34" charset="0"/>
+                <a:ea typeface="+mn-ea"/>
+                <a:cs typeface="+mn-cs"/>
+              </a:rPr>
+              <a:t>Next up, the horizontal tail. It only generates a small amount of lift most of the time, and its real job is acting as a key control surface. Control the attack angle of aircraft.</a:t>
+            </a:r>
+            <a:endParaRPr lang="zh-CN" altLang="en-US" dirty="0"/>
+          </a:p>
+        </p:txBody>
+      </p:sp>
+      <p:sp>
+        <p:nvSpPr>
+          <p:cNvPr id="4" name="灯片编号占位符 3"/>
+          <p:cNvSpPr>
+            <a:spLocks noGrp="1"/>
+          </p:cNvSpPr>
+          <p:nvPr>
+            <p:ph type="sldNum" sz="quarter" idx="5"/>
+          </p:nvPr>
+        </p:nvSpPr>
+        <p:spPr/>
+        <p:txBody>
+          <a:bodyPr/>
+          <a:lstStyle/>
+          <a:p>
+            <a:fld id="{DF1895BC-06EC-475A-97CA-BF53472F2E03}" type="slidenum">
+              <a:rPr lang="de-DE" smtClean="0"/>
+              <a:pPr/>
+              <a:t>17</a:t>
+            </a:fld>
+            <a:endParaRPr lang="de-DE" dirty="0"/>
+          </a:p>
+        </p:txBody>
+      </p:sp>
+    </p:spTree>
+    <p:extLst>
+      <p:ext uri="{BB962C8B-B14F-4D97-AF65-F5344CB8AC3E}">
+        <p14:creationId xmlns:p14="http://schemas.microsoft.com/office/powerpoint/2010/main" val="3076744365"/>
+      </p:ext>
+    </p:extLst>
+  </p:cSld>
+  <p:clrMapOvr>
+    <a:masterClrMapping/>
+  </p:clrMapOvr>
+</p:notes>
+</file>
+
+<file path=ppt/notesSlides/notesSlide18.xml><?xml version="1.0" encoding="utf-8"?>
+<p:notes xmlns:a="http://schemas.openxmlformats.org/drawingml/2006/main" xmlns:r="http://schemas.openxmlformats.org/officeDocument/2006/relationships" xmlns:p="http://schemas.openxmlformats.org/presentationml/2006/main">
+  <p:cSld>
+    <p:spTree>
+      <p:nvGrpSpPr>
+        <p:cNvPr id="1" name=""/>
+        <p:cNvGrpSpPr/>
+        <p:nvPr/>
+      </p:nvGrpSpPr>
+      <p:grpSpPr>
+        <a:xfrm>
+          <a:off x="0" y="0"/>
+          <a:ext cx="0" cy="0"/>
+          <a:chOff x="0" y="0"/>
+          <a:chExt cx="0" cy="0"/>
+        </a:xfrm>
+      </p:grpSpPr>
+      <p:sp>
+        <p:nvSpPr>
+          <p:cNvPr id="2" name="幻灯片图像占位符 1"/>
+          <p:cNvSpPr>
+            <a:spLocks noGrp="1" noRot="1" noChangeAspect="1"/>
+          </p:cNvSpPr>
+          <p:nvPr>
+            <p:ph type="sldImg"/>
+          </p:nvPr>
+        </p:nvSpPr>
+        <p:spPr/>
+      </p:sp>
+      <p:sp>
+        <p:nvSpPr>
+          <p:cNvPr id="3" name="备注占位符 2"/>
+          <p:cNvSpPr>
+            <a:spLocks noGrp="1"/>
+          </p:cNvSpPr>
+          <p:nvPr>
+            <p:ph type="body" idx="1"/>
+          </p:nvPr>
+        </p:nvSpPr>
+        <p:spPr/>
+        <p:txBody>
+          <a:bodyPr/>
+          <a:lstStyle/>
+          <a:p>
+            <a:r>
+              <a:rPr lang="en-US" altLang="zh-CN" dirty="0"/>
+              <a:t>Then the vertical tail. Just like the horizontal tail, it also works as a control surface, and it’s mainly in charge of the aircraft’s heading control.</a:t>
+            </a:r>
+            <a:endParaRPr lang="zh-CN" altLang="en-US" dirty="0"/>
+          </a:p>
+        </p:txBody>
+      </p:sp>
+      <p:sp>
+        <p:nvSpPr>
+          <p:cNvPr id="4" name="灯片编号占位符 3"/>
+          <p:cNvSpPr>
+            <a:spLocks noGrp="1"/>
+          </p:cNvSpPr>
+          <p:nvPr>
+            <p:ph type="sldNum" sz="quarter" idx="5"/>
+          </p:nvPr>
+        </p:nvSpPr>
+        <p:spPr/>
+        <p:txBody>
+          <a:bodyPr/>
+          <a:lstStyle/>
+          <a:p>
+            <a:fld id="{DF1895BC-06EC-475A-97CA-BF53472F2E03}" type="slidenum">
+              <a:rPr lang="de-DE" smtClean="0"/>
+              <a:pPr/>
+              <a:t>18</a:t>
+            </a:fld>
+            <a:endParaRPr lang="de-DE" dirty="0"/>
+          </a:p>
+        </p:txBody>
+      </p:sp>
+    </p:spTree>
+    <p:extLst>
+      <p:ext uri="{BB962C8B-B14F-4D97-AF65-F5344CB8AC3E}">
+        <p14:creationId xmlns:p14="http://schemas.microsoft.com/office/powerpoint/2010/main" val="3116331329"/>
+      </p:ext>
+    </p:extLst>
+  </p:cSld>
+  <p:clrMapOvr>
+    <a:masterClrMapping/>
+  </p:clrMapOvr>
+</p:notes>
+</file>
+
+<file path=ppt/notesSlides/notesSlide19.xml><?xml version="1.0" encoding="utf-8"?>
+<p:notes xmlns:a="http://schemas.openxmlformats.org/drawingml/2006/main" xmlns:r="http://schemas.openxmlformats.org/officeDocument/2006/relationships" xmlns:p="http://schemas.openxmlformats.org/presentationml/2006/main">
+  <p:cSld>
+    <p:spTree>
+      <p:nvGrpSpPr>
+        <p:cNvPr id="1" name=""/>
+        <p:cNvGrpSpPr/>
+        <p:nvPr/>
+      </p:nvGrpSpPr>
+      <p:grpSpPr>
+        <a:xfrm>
+          <a:off x="0" y="0"/>
+          <a:ext cx="0" cy="0"/>
+          <a:chOff x="0" y="0"/>
+          <a:chExt cx="0" cy="0"/>
+        </a:xfrm>
+      </p:grpSpPr>
+      <p:sp>
+        <p:nvSpPr>
+          <p:cNvPr id="2" name="幻灯片图像占位符 1"/>
+          <p:cNvSpPr>
+            <a:spLocks noGrp="1" noRot="1" noChangeAspect="1"/>
+          </p:cNvSpPr>
+          <p:nvPr>
+            <p:ph type="sldImg"/>
+          </p:nvPr>
+        </p:nvSpPr>
+        <p:spPr/>
+      </p:sp>
+      <p:sp>
+        <p:nvSpPr>
+          <p:cNvPr id="3" name="备注占位符 2"/>
+          <p:cNvSpPr>
+            <a:spLocks noGrp="1"/>
+          </p:cNvSpPr>
+          <p:nvPr>
+            <p:ph type="body" idx="1"/>
+          </p:nvPr>
+        </p:nvSpPr>
+        <p:spPr/>
+        <p:txBody>
+          <a:bodyPr/>
+          <a:lstStyle/>
+          <a:p>
+            <a:r>
+              <a:rPr lang="en-US" altLang="zh-CN" sz="1200" b="0" i="0" kern="1200" dirty="0">
+                <a:solidFill>
+                  <a:schemeClr val="tx1"/>
+                </a:solidFill>
+                <a:effectLst/>
+                <a:latin typeface="Arial" pitchFamily="34" charset="0"/>
+                <a:ea typeface="+mn-ea"/>
+                <a:cs typeface="+mn-cs"/>
+              </a:rPr>
+              <a:t>Now, moving on to the fuselage. Unlike the wings, its design isn’t super straightforward. It narrows down in some sections and widen out in others, and it’s pretty hard to picture all those shape details just in our heads. That’s why we need </a:t>
+            </a:r>
+            <a:r>
+              <a:rPr lang="en-US" altLang="zh-CN" sz="1200" b="0" i="0" kern="1200">
+                <a:solidFill>
+                  <a:schemeClr val="tx1"/>
+                </a:solidFill>
+                <a:effectLst/>
+                <a:latin typeface="Arial" pitchFamily="34" charset="0"/>
+                <a:ea typeface="+mn-ea"/>
+                <a:cs typeface="+mn-cs"/>
+              </a:rPr>
+              <a:t>extra methods </a:t>
+            </a:r>
+            <a:r>
+              <a:rPr lang="en-US" altLang="zh-CN" sz="1200" b="0" i="0" kern="1200" dirty="0">
+                <a:solidFill>
+                  <a:schemeClr val="tx1"/>
+                </a:solidFill>
+                <a:effectLst/>
+                <a:latin typeface="Arial" pitchFamily="34" charset="0"/>
+                <a:ea typeface="+mn-ea"/>
+                <a:cs typeface="+mn-cs"/>
+              </a:rPr>
+              <a:t>to visualize the aircraft and check what it actually looks like based on our code.</a:t>
+            </a:r>
+            <a:endParaRPr lang="zh-CN" altLang="en-US" dirty="0"/>
+          </a:p>
+        </p:txBody>
+      </p:sp>
+      <p:sp>
+        <p:nvSpPr>
+          <p:cNvPr id="4" name="灯片编号占位符 3"/>
+          <p:cNvSpPr>
+            <a:spLocks noGrp="1"/>
+          </p:cNvSpPr>
+          <p:nvPr>
+            <p:ph type="sldNum" sz="quarter" idx="5"/>
+          </p:nvPr>
+        </p:nvSpPr>
+        <p:spPr/>
+        <p:txBody>
+          <a:bodyPr/>
+          <a:lstStyle/>
+          <a:p>
+            <a:fld id="{DF1895BC-06EC-475A-97CA-BF53472F2E03}" type="slidenum">
+              <a:rPr lang="de-DE" smtClean="0"/>
+              <a:pPr/>
+              <a:t>19</a:t>
+            </a:fld>
+            <a:endParaRPr lang="de-DE" dirty="0"/>
+          </a:p>
+        </p:txBody>
+      </p:sp>
+    </p:spTree>
+    <p:extLst>
+      <p:ext uri="{BB962C8B-B14F-4D97-AF65-F5344CB8AC3E}">
+        <p14:creationId xmlns:p14="http://schemas.microsoft.com/office/powerpoint/2010/main" val="1983743643"/>
       </p:ext>
     </p:extLst>
   </p:cSld>
@@ -1230,6 +2435,219 @@
     <p:extLst>
       <p:ext uri="{BB962C8B-B14F-4D97-AF65-F5344CB8AC3E}">
         <p14:creationId xmlns:p14="http://schemas.microsoft.com/office/powerpoint/2010/main" val="1973395650"/>
+      </p:ext>
+    </p:extLst>
+  </p:cSld>
+  <p:clrMapOvr>
+    <a:masterClrMapping/>
+  </p:clrMapOvr>
+</p:notes>
+</file>
+
+<file path=ppt/notesSlides/notesSlide20.xml><?xml version="1.0" encoding="utf-8"?>
+<p:notes xmlns:a="http://schemas.openxmlformats.org/drawingml/2006/main" xmlns:r="http://schemas.openxmlformats.org/officeDocument/2006/relationships" xmlns:p="http://schemas.openxmlformats.org/presentationml/2006/main">
+  <p:cSld>
+    <p:spTree>
+      <p:nvGrpSpPr>
+        <p:cNvPr id="1" name=""/>
+        <p:cNvGrpSpPr/>
+        <p:nvPr/>
+      </p:nvGrpSpPr>
+      <p:grpSpPr>
+        <a:xfrm>
+          <a:off x="0" y="0"/>
+          <a:ext cx="0" cy="0"/>
+          <a:chOff x="0" y="0"/>
+          <a:chExt cx="0" cy="0"/>
+        </a:xfrm>
+      </p:grpSpPr>
+      <p:sp>
+        <p:nvSpPr>
+          <p:cNvPr id="2" name="幻灯片图像占位符 1"/>
+          <p:cNvSpPr>
+            <a:spLocks noGrp="1" noRot="1" noChangeAspect="1"/>
+          </p:cNvSpPr>
+          <p:nvPr>
+            <p:ph type="sldImg"/>
+          </p:nvPr>
+        </p:nvSpPr>
+        <p:spPr/>
+        <p:txBody>
+          <a:bodyPr/>
+          <a:lstStyle/>
+          <a:p>
+            <a:endParaRPr lang="zh-CN" altLang="en-US"/>
+          </a:p>
+        </p:txBody>
+      </p:sp>
+      <p:sp>
+        <p:nvSpPr>
+          <p:cNvPr id="3" name="备注占位符 2"/>
+          <p:cNvSpPr>
+            <a:spLocks noGrp="1"/>
+          </p:cNvSpPr>
+          <p:nvPr>
+            <p:ph type="body" idx="1"/>
+          </p:nvPr>
+        </p:nvSpPr>
+        <p:spPr/>
+        <p:txBody>
+          <a:bodyPr/>
+          <a:lstStyle/>
+          <a:p>
+            <a:endParaRPr lang="zh-CN" altLang="en-US" dirty="0"/>
+          </a:p>
+        </p:txBody>
+      </p:sp>
+      <p:sp>
+        <p:nvSpPr>
+          <p:cNvPr id="4" name="灯片编号占位符 3"/>
+          <p:cNvSpPr>
+            <a:spLocks noGrp="1"/>
+          </p:cNvSpPr>
+          <p:nvPr>
+            <p:ph type="sldNum" sz="quarter" idx="5"/>
+          </p:nvPr>
+        </p:nvSpPr>
+        <p:spPr/>
+        <p:txBody>
+          <a:bodyPr/>
+          <a:lstStyle/>
+          <a:p>
+            <a:fld id="{DF1895BC-06EC-475A-97CA-BF53472F2E03}" type="slidenum">
+              <a:rPr lang="de-DE" smtClean="0"/>
+              <a:pPr/>
+              <a:t>29</a:t>
+            </a:fld>
+            <a:endParaRPr lang="de-DE" dirty="0"/>
+          </a:p>
+        </p:txBody>
+      </p:sp>
+    </p:spTree>
+    <p:extLst>
+      <p:ext uri="{BB962C8B-B14F-4D97-AF65-F5344CB8AC3E}">
+        <p14:creationId xmlns:p14="http://schemas.microsoft.com/office/powerpoint/2010/main" val="4186176737"/>
+      </p:ext>
+    </p:extLst>
+  </p:cSld>
+  <p:clrMapOvr>
+    <a:masterClrMapping/>
+  </p:clrMapOvr>
+</p:notes>
+</file>
+
+<file path=ppt/notesSlides/notesSlide21.xml><?xml version="1.0" encoding="utf-8"?>
+<p:notes xmlns:a="http://schemas.openxmlformats.org/drawingml/2006/main" xmlns:r="http://schemas.openxmlformats.org/officeDocument/2006/relationships" xmlns:p="http://schemas.openxmlformats.org/presentationml/2006/main">
+  <p:cSld>
+    <p:spTree>
+      <p:nvGrpSpPr>
+        <p:cNvPr id="1" name="">
+          <a:extLst>
+            <a:ext uri="{FF2B5EF4-FFF2-40B4-BE49-F238E27FC236}">
+              <a16:creationId xmlns:a16="http://schemas.microsoft.com/office/drawing/2014/main" id="{8D36FB09-97AA-7E29-A45A-775B0F9F908E}"/>
+            </a:ext>
+          </a:extLst>
+        </p:cNvPr>
+        <p:cNvGrpSpPr/>
+        <p:nvPr/>
+      </p:nvGrpSpPr>
+      <p:grpSpPr>
+        <a:xfrm>
+          <a:off x="0" y="0"/>
+          <a:ext cx="0" cy="0"/>
+          <a:chOff x="0" y="0"/>
+          <a:chExt cx="0" cy="0"/>
+        </a:xfrm>
+      </p:grpSpPr>
+      <p:sp>
+        <p:nvSpPr>
+          <p:cNvPr id="2" name="幻灯片图像占位符 1">
+            <a:extLst>
+              <a:ext uri="{FF2B5EF4-FFF2-40B4-BE49-F238E27FC236}">
+                <a16:creationId xmlns:a16="http://schemas.microsoft.com/office/drawing/2014/main" id="{C080F85E-744A-3B8D-8811-4AD5135D7910}"/>
+              </a:ext>
+            </a:extLst>
+          </p:cNvPr>
+          <p:cNvSpPr>
+            <a:spLocks noGrp="1" noRot="1" noChangeAspect="1"/>
+          </p:cNvSpPr>
+          <p:nvPr>
+            <p:ph type="sldImg"/>
+          </p:nvPr>
+        </p:nvSpPr>
+        <p:spPr>
+          <a:xfrm>
+            <a:off x="90488" y="744538"/>
+            <a:ext cx="6616700" cy="3722687"/>
+          </a:xfrm>
+        </p:spPr>
+        <p:txBody>
+          <a:bodyPr/>
+          <a:lstStyle/>
+          <a:p>
+            <a:endParaRPr lang="zh-CN" altLang="en-US"/>
+          </a:p>
+        </p:txBody>
+      </p:sp>
+      <p:sp>
+        <p:nvSpPr>
+          <p:cNvPr id="3" name="备注占位符 2">
+            <a:extLst>
+              <a:ext uri="{FF2B5EF4-FFF2-40B4-BE49-F238E27FC236}">
+                <a16:creationId xmlns:a16="http://schemas.microsoft.com/office/drawing/2014/main" id="{2494A4A5-24CF-5C2C-B6A3-5DE10E411098}"/>
+              </a:ext>
+            </a:extLst>
+          </p:cNvPr>
+          <p:cNvSpPr>
+            <a:spLocks noGrp="1"/>
+          </p:cNvSpPr>
+          <p:nvPr>
+            <p:ph type="body" idx="1"/>
+          </p:nvPr>
+        </p:nvSpPr>
+        <p:spPr/>
+        <p:txBody>
+          <a:bodyPr/>
+          <a:lstStyle/>
+          <a:p>
+            <a:endParaRPr lang="zh-CN" altLang="en-US" dirty="0"/>
+          </a:p>
+        </p:txBody>
+      </p:sp>
+      <p:sp>
+        <p:nvSpPr>
+          <p:cNvPr id="4" name="灯片编号占位符 3">
+            <a:extLst>
+              <a:ext uri="{FF2B5EF4-FFF2-40B4-BE49-F238E27FC236}">
+                <a16:creationId xmlns:a16="http://schemas.microsoft.com/office/drawing/2014/main" id="{8021127B-505F-3B1A-2AAA-65DF92B51E67}"/>
+              </a:ext>
+            </a:extLst>
+          </p:cNvPr>
+          <p:cNvSpPr>
+            <a:spLocks noGrp="1"/>
+          </p:cNvSpPr>
+          <p:nvPr>
+            <p:ph type="sldNum" sz="quarter" idx="10"/>
+          </p:nvPr>
+        </p:nvSpPr>
+        <p:spPr/>
+        <p:txBody>
+          <a:bodyPr/>
+          <a:lstStyle/>
+          <a:p>
+            <a:fld id="{DF1895BC-06EC-475A-97CA-BF53472F2E03}" type="slidenum">
+              <a:rPr lang="de-DE" smtClean="0"/>
+              <a:pPr/>
+              <a:t>37</a:t>
+            </a:fld>
+            <a:endParaRPr lang="de-DE" dirty="0"/>
+          </a:p>
+        </p:txBody>
+      </p:sp>
+    </p:spTree>
+    <p:extLst>
+      <p:ext uri="{BB962C8B-B14F-4D97-AF65-F5344CB8AC3E}">
+        <p14:creationId xmlns:p14="http://schemas.microsoft.com/office/powerpoint/2010/main" val="1157948595"/>
       </p:ext>
     </p:extLst>
   </p:cSld>
@@ -1959,10 +3377,10 @@
               <a:rPr lang="en-US" altLang="zh-CN" dirty="0"/>
               <a:t>() module, because this module calculate quickly, is suitable for our class, you can just get results in several seconds. Now we add the energy module, the planet module and the atmosphere module into this function so that it can run correctly.</a:t>
             </a:r>
-            <a:endParaRPr lang="zh-CN" altLang="en-US"/>
-          </a:p>
-          <a:p>
-            <a:endParaRPr lang="zh-CN" altLang="en-US"/>
+            <a:endParaRPr lang="zh-CN" altLang="en-US" dirty="0"/>
+          </a:p>
+          <a:p>
+            <a:endParaRPr lang="zh-CN" altLang="en-US" dirty="0"/>
           </a:p>
         </p:txBody>
       </p:sp>
@@ -25835,7 +27253,7 @@
           <p:nvPr/>
         </p:nvPicPr>
         <p:blipFill>
-          <a:blip r:embed="rId2"/>
+          <a:blip r:embed="rId3"/>
           <a:stretch>
             <a:fillRect/>
           </a:stretch>
@@ -27409,7 +28827,7 @@
           <p:nvPr/>
         </p:nvPicPr>
         <p:blipFill>
-          <a:blip r:embed="rId2"/>
+          <a:blip r:embed="rId3"/>
           <a:stretch>
             <a:fillRect/>
           </a:stretch>
@@ -28502,7 +29920,7 @@
           <p:nvPr/>
         </p:nvPicPr>
         <p:blipFill>
-          <a:blip r:embed="rId2"/>
+          <a:blip r:embed="rId3"/>
           <a:stretch>
             <a:fillRect/>
           </a:stretch>
@@ -29554,7 +30972,7 @@
           <p:nvPr/>
         </p:nvPicPr>
         <p:blipFill>
-          <a:blip r:embed="rId2"/>
+          <a:blip r:embed="rId3"/>
           <a:stretch>
             <a:fillRect/>
           </a:stretch>
@@ -29787,7 +31205,7 @@
           <p:nvPr/>
         </p:nvPicPr>
         <p:blipFill>
-          <a:blip r:embed="rId2"/>
+          <a:blip r:embed="rId3"/>
           <a:stretch>
             <a:fillRect/>
           </a:stretch>

--- a/Design Conceptual Aircraft via SUAVE.pptx
+++ b/Design Conceptual Aircraft via SUAVE.pptx
@@ -327,7 +327,7 @@
             <a:fld id="{D7F4AE8B-A150-4820-BC27-EE42D733F4B8}" type="datetimeFigureOut">
               <a:rPr lang="en-GB" smtClean="0"/>
               <a:pPr/>
-              <a:t>25/04/2026</a:t>
+              <a:t>26/04/2026</a:t>
             </a:fld>
             <a:endParaRPr lang="en-GB"/>
           </a:p>
@@ -499,7 +499,7 @@
             <a:fld id="{45B75E70-762A-4375-AA7C-DE9BB7CC9339}" type="datetimeFigureOut">
               <a:rPr lang="de-DE" smtClean="0"/>
               <a:pPr/>
-              <a:t>25.04.2026</a:t>
+              <a:t>26.04.2026</a:t>
             </a:fld>
             <a:endParaRPr lang="de-DE" dirty="0"/>
           </a:p>
@@ -2253,10 +2253,10 @@
                 <a:ea typeface="+mn-ea"/>
                 <a:cs typeface="+mn-cs"/>
               </a:rPr>
-              <a:t>Now, moving on to the fuselage. Unlike the wings, its design isn’t super straightforward. It narrows down in some sections and widen out in others, and it’s pretty hard to picture all those shape details just in our heads. That’s why we need </a:t>
-            </a:r>
-            <a:r>
-              <a:rPr lang="en-US" altLang="zh-CN" sz="1200" b="0" i="0" kern="1200">
+              <a:t>Now, moving on to the fuselage. Unlike the wings, its design isn’t super straightforward. It narrows down in some sections and widen out in others, and it’s pretty hard to picture all those shape details just in our heads. That’s why we need extra methods to visualize the aircraft and check what it actually looks like based on our </a:t>
+            </a:r>
+            <a:r>
+              <a:rPr lang="en-US" altLang="zh-CN" sz="1200" b="0" i="0" kern="1200" dirty="0" err="1">
                 <a:solidFill>
                   <a:schemeClr val="tx1"/>
                 </a:solidFill>
@@ -2265,7 +2265,7 @@
                 <a:ea typeface="+mn-ea"/>
                 <a:cs typeface="+mn-cs"/>
               </a:rPr>
-              <a:t>extra methods </a:t>
+              <a:t>code.but</a:t>
             </a:r>
             <a:r>
               <a:rPr lang="en-US" altLang="zh-CN" sz="1200" b="0" i="0" kern="1200" dirty="0">
@@ -2277,9 +2277,8 @@
                 <a:ea typeface="+mn-ea"/>
                 <a:cs typeface="+mn-cs"/>
               </a:rPr>
-              <a:t>to visualize the aircraft and check what it actually looks like based on our code.</a:t>
-            </a:r>
-            <a:endParaRPr lang="zh-CN" altLang="en-US" dirty="0"/>
+              <a:t> we will save that for later, no hurry. Right now, let’s keep moving and finish setting up the vehicle.</a:t>
+            </a:r>
           </a:p>
         </p:txBody>
       </p:sp>
@@ -2472,6 +2471,515 @@
           </p:nvPr>
         </p:nvSpPr>
         <p:spPr/>
+      </p:sp>
+      <p:sp>
+        <p:nvSpPr>
+          <p:cNvPr id="3" name="备注占位符 2"/>
+          <p:cNvSpPr>
+            <a:spLocks noGrp="1"/>
+          </p:cNvSpPr>
+          <p:nvPr>
+            <p:ph type="body" idx="1"/>
+          </p:nvPr>
+        </p:nvSpPr>
+        <p:spPr/>
+        <p:txBody>
+          <a:bodyPr/>
+          <a:lstStyle/>
+          <a:p>
+            <a:r>
+              <a:rPr lang="en-US" altLang="zh-CN" sz="1200" b="0" i="0" kern="1200" dirty="0">
+                <a:solidFill>
+                  <a:schemeClr val="tx1"/>
+                </a:solidFill>
+                <a:effectLst/>
+                <a:latin typeface="Arial" pitchFamily="34" charset="0"/>
+                <a:ea typeface="+mn-ea"/>
+                <a:cs typeface="+mn-cs"/>
+              </a:rPr>
+              <a:t>Alright, the last component we’ve got is the nacelle. Here we use the </a:t>
+            </a:r>
+            <a:r>
+              <a:rPr lang="en-US" altLang="zh-CN" sz="1200" b="0" i="0" kern="1200" dirty="0" err="1">
+                <a:solidFill>
+                  <a:schemeClr val="tx1"/>
+                </a:solidFill>
+                <a:effectLst/>
+                <a:latin typeface="Arial" pitchFamily="34" charset="0"/>
+                <a:ea typeface="+mn-ea"/>
+                <a:cs typeface="+mn-cs"/>
+              </a:rPr>
+              <a:t>deepcopy</a:t>
+            </a:r>
+            <a:r>
+              <a:rPr lang="en-US" altLang="zh-CN" sz="1200" b="0" i="0" kern="1200" dirty="0">
+                <a:solidFill>
+                  <a:schemeClr val="tx1"/>
+                </a:solidFill>
+                <a:effectLst/>
+                <a:latin typeface="Arial" pitchFamily="34" charset="0"/>
+                <a:ea typeface="+mn-ea"/>
+                <a:cs typeface="+mn-cs"/>
+              </a:rPr>
+              <a:t> function to make sure both nacelles share the exact same parameters, then we just place the second one symmetrically.</a:t>
+            </a:r>
+            <a:endParaRPr lang="zh-CN" altLang="en-US" dirty="0"/>
+          </a:p>
+        </p:txBody>
+      </p:sp>
+      <p:sp>
+        <p:nvSpPr>
+          <p:cNvPr id="4" name="灯片编号占位符 3"/>
+          <p:cNvSpPr>
+            <a:spLocks noGrp="1"/>
+          </p:cNvSpPr>
+          <p:nvPr>
+            <p:ph type="sldNum" sz="quarter" idx="5"/>
+          </p:nvPr>
+        </p:nvSpPr>
+        <p:spPr/>
+        <p:txBody>
+          <a:bodyPr/>
+          <a:lstStyle/>
+          <a:p>
+            <a:fld id="{DF1895BC-06EC-475A-97CA-BF53472F2E03}" type="slidenum">
+              <a:rPr lang="de-DE" smtClean="0"/>
+              <a:pPr/>
+              <a:t>20</a:t>
+            </a:fld>
+            <a:endParaRPr lang="de-DE" dirty="0"/>
+          </a:p>
+        </p:txBody>
+      </p:sp>
+    </p:spTree>
+    <p:extLst>
+      <p:ext uri="{BB962C8B-B14F-4D97-AF65-F5344CB8AC3E}">
+        <p14:creationId xmlns:p14="http://schemas.microsoft.com/office/powerpoint/2010/main" val="3008466831"/>
+      </p:ext>
+    </p:extLst>
+  </p:cSld>
+  <p:clrMapOvr>
+    <a:masterClrMapping/>
+  </p:clrMapOvr>
+</p:notes>
+</file>
+
+<file path=ppt/notesSlides/notesSlide21.xml><?xml version="1.0" encoding="utf-8"?>
+<p:notes xmlns:a="http://schemas.openxmlformats.org/drawingml/2006/main" xmlns:r="http://schemas.openxmlformats.org/officeDocument/2006/relationships" xmlns:p="http://schemas.openxmlformats.org/presentationml/2006/main">
+  <p:cSld>
+    <p:spTree>
+      <p:nvGrpSpPr>
+        <p:cNvPr id="1" name=""/>
+        <p:cNvGrpSpPr/>
+        <p:nvPr/>
+      </p:nvGrpSpPr>
+      <p:grpSpPr>
+        <a:xfrm>
+          <a:off x="0" y="0"/>
+          <a:ext cx="0" cy="0"/>
+          <a:chOff x="0" y="0"/>
+          <a:chExt cx="0" cy="0"/>
+        </a:xfrm>
+      </p:grpSpPr>
+      <p:sp>
+        <p:nvSpPr>
+          <p:cNvPr id="2" name="幻灯片图像占位符 1"/>
+          <p:cNvSpPr>
+            <a:spLocks noGrp="1" noRot="1" noChangeAspect="1"/>
+          </p:cNvSpPr>
+          <p:nvPr>
+            <p:ph type="sldImg"/>
+          </p:nvPr>
+        </p:nvSpPr>
+        <p:spPr/>
+      </p:sp>
+      <p:sp>
+        <p:nvSpPr>
+          <p:cNvPr id="3" name="备注占位符 2"/>
+          <p:cNvSpPr>
+            <a:spLocks noGrp="1"/>
+          </p:cNvSpPr>
+          <p:nvPr>
+            <p:ph type="body" idx="1"/>
+          </p:nvPr>
+        </p:nvSpPr>
+        <p:spPr/>
+        <p:txBody>
+          <a:bodyPr/>
+          <a:lstStyle/>
+          <a:p>
+            <a:r>
+              <a:rPr lang="en-US" altLang="zh-CN" sz="1200" b="0" i="0" kern="1200" dirty="0">
+                <a:solidFill>
+                  <a:schemeClr val="tx1"/>
+                </a:solidFill>
+                <a:effectLst/>
+                <a:latin typeface="Arial" pitchFamily="34" charset="0"/>
+                <a:ea typeface="+mn-ea"/>
+                <a:cs typeface="+mn-cs"/>
+              </a:rPr>
+              <a:t>Alright, next up is the turbofan network. Honestly, I really wanted to simplify this whole section, since engine design isn’t my main research focus, and I don’t know much about it. But sadly, I totally failed at that. I don’t know how to simplify this part. In conceptual design sometime we just need the Thrust and Fuel consumption. Maybe in other aircraft design research we just directly give the value of the two parameters. But SUAVE runs through a bunch of engineering formulas to calculate overall thrust and fuel consumption rate based on the engine cycle process. Anyway, since we can’t skip or simplify it, just copy the code as it is. I’ll keep explanations short and sweet as we go. And if anyone here knows a thing or two about engines, feel free to chime in and add extra info. So well the first part we define the location of engineer, </a:t>
+            </a:r>
+            <a:r>
+              <a:rPr lang="en-US" altLang="zh-CN" sz="1200" b="0" i="0" kern="1200" dirty="0" err="1">
+                <a:solidFill>
+                  <a:schemeClr val="tx1"/>
+                </a:solidFill>
+                <a:effectLst/>
+                <a:latin typeface="Arial" pitchFamily="34" charset="0"/>
+                <a:ea typeface="+mn-ea"/>
+                <a:cs typeface="+mn-cs"/>
+              </a:rPr>
+              <a:t>bypass_ratio</a:t>
+            </a:r>
+            <a:r>
+              <a:rPr lang="en-US" altLang="zh-CN" sz="1200" b="0" i="0" kern="1200" dirty="0">
+                <a:solidFill>
+                  <a:schemeClr val="tx1"/>
+                </a:solidFill>
+                <a:effectLst/>
+                <a:latin typeface="Arial" pitchFamily="34" charset="0"/>
+                <a:ea typeface="+mn-ea"/>
+                <a:cs typeface="+mn-cs"/>
+              </a:rPr>
+              <a:t>, number of engines, and work fluid is air of course. And the location and number of engines need to correspond to the nacelle setup.</a:t>
+            </a:r>
+            <a:endParaRPr lang="zh-CN" altLang="en-US" dirty="0"/>
+          </a:p>
+        </p:txBody>
+      </p:sp>
+      <p:sp>
+        <p:nvSpPr>
+          <p:cNvPr id="4" name="灯片编号占位符 3"/>
+          <p:cNvSpPr>
+            <a:spLocks noGrp="1"/>
+          </p:cNvSpPr>
+          <p:nvPr>
+            <p:ph type="sldNum" sz="quarter" idx="5"/>
+          </p:nvPr>
+        </p:nvSpPr>
+        <p:spPr/>
+        <p:txBody>
+          <a:bodyPr/>
+          <a:lstStyle/>
+          <a:p>
+            <a:fld id="{DF1895BC-06EC-475A-97CA-BF53472F2E03}" type="slidenum">
+              <a:rPr lang="de-DE" smtClean="0"/>
+              <a:pPr/>
+              <a:t>21</a:t>
+            </a:fld>
+            <a:endParaRPr lang="de-DE" dirty="0"/>
+          </a:p>
+        </p:txBody>
+      </p:sp>
+    </p:spTree>
+    <p:extLst>
+      <p:ext uri="{BB962C8B-B14F-4D97-AF65-F5344CB8AC3E}">
+        <p14:creationId xmlns:p14="http://schemas.microsoft.com/office/powerpoint/2010/main" val="2791747170"/>
+      </p:ext>
+    </p:extLst>
+  </p:cSld>
+  <p:clrMapOvr>
+    <a:masterClrMapping/>
+  </p:clrMapOvr>
+</p:notes>
+</file>
+
+<file path=ppt/notesSlides/notesSlide22.xml><?xml version="1.0" encoding="utf-8"?>
+<p:notes xmlns:a="http://schemas.openxmlformats.org/drawingml/2006/main" xmlns:r="http://schemas.openxmlformats.org/officeDocument/2006/relationships" xmlns:p="http://schemas.openxmlformats.org/presentationml/2006/main">
+  <p:cSld>
+    <p:spTree>
+      <p:nvGrpSpPr>
+        <p:cNvPr id="1" name=""/>
+        <p:cNvGrpSpPr/>
+        <p:nvPr/>
+      </p:nvGrpSpPr>
+      <p:grpSpPr>
+        <a:xfrm>
+          <a:off x="0" y="0"/>
+          <a:ext cx="0" cy="0"/>
+          <a:chOff x="0" y="0"/>
+          <a:chExt cx="0" cy="0"/>
+        </a:xfrm>
+      </p:grpSpPr>
+      <p:sp>
+        <p:nvSpPr>
+          <p:cNvPr id="2" name="幻灯片图像占位符 1"/>
+          <p:cNvSpPr>
+            <a:spLocks noGrp="1" noRot="1" noChangeAspect="1"/>
+          </p:cNvSpPr>
+          <p:nvPr>
+            <p:ph type="sldImg"/>
+          </p:nvPr>
+        </p:nvSpPr>
+        <p:spPr/>
+      </p:sp>
+      <p:sp>
+        <p:nvSpPr>
+          <p:cNvPr id="3" name="备注占位符 2"/>
+          <p:cNvSpPr>
+            <a:spLocks noGrp="1"/>
+          </p:cNvSpPr>
+          <p:nvPr>
+            <p:ph type="body" idx="1"/>
+          </p:nvPr>
+        </p:nvSpPr>
+        <p:spPr/>
+        <p:txBody>
+          <a:bodyPr/>
+          <a:lstStyle/>
+          <a:p>
+            <a:r>
+              <a:rPr lang="en-US" altLang="zh-CN" sz="1200" b="0" i="0" kern="1200" dirty="0">
+                <a:solidFill>
+                  <a:schemeClr val="tx1"/>
+                </a:solidFill>
+                <a:effectLst/>
+                <a:latin typeface="Arial" pitchFamily="34" charset="0"/>
+                <a:ea typeface="+mn-ea"/>
+                <a:cs typeface="+mn-cs"/>
+              </a:rPr>
+              <a:t>Alright, moving on to the ram and inlet nozzle. The ram doesn’t have any extra parameters, and we just set the polytropic efficiency and pressure ratio to 0.98. Basically, that means we use a pretty high-efficiency engine here.</a:t>
+            </a:r>
+            <a:endParaRPr lang="zh-CN" altLang="en-US" dirty="0"/>
+          </a:p>
+        </p:txBody>
+      </p:sp>
+      <p:sp>
+        <p:nvSpPr>
+          <p:cNvPr id="4" name="灯片编号占位符 3"/>
+          <p:cNvSpPr>
+            <a:spLocks noGrp="1"/>
+          </p:cNvSpPr>
+          <p:nvPr>
+            <p:ph type="sldNum" sz="quarter" idx="5"/>
+          </p:nvPr>
+        </p:nvSpPr>
+        <p:spPr/>
+        <p:txBody>
+          <a:bodyPr/>
+          <a:lstStyle/>
+          <a:p>
+            <a:fld id="{DF1895BC-06EC-475A-97CA-BF53472F2E03}" type="slidenum">
+              <a:rPr lang="de-DE" smtClean="0"/>
+              <a:pPr/>
+              <a:t>22</a:t>
+            </a:fld>
+            <a:endParaRPr lang="de-DE" dirty="0"/>
+          </a:p>
+        </p:txBody>
+      </p:sp>
+    </p:spTree>
+    <p:extLst>
+      <p:ext uri="{BB962C8B-B14F-4D97-AF65-F5344CB8AC3E}">
+        <p14:creationId xmlns:p14="http://schemas.microsoft.com/office/powerpoint/2010/main" val="2937595091"/>
+      </p:ext>
+    </p:extLst>
+  </p:cSld>
+  <p:clrMapOvr>
+    <a:masterClrMapping/>
+  </p:clrMapOvr>
+</p:notes>
+</file>
+
+<file path=ppt/notesSlides/notesSlide23.xml><?xml version="1.0" encoding="utf-8"?>
+<p:notes xmlns:a="http://schemas.openxmlformats.org/drawingml/2006/main" xmlns:r="http://schemas.openxmlformats.org/officeDocument/2006/relationships" xmlns:p="http://schemas.openxmlformats.org/presentationml/2006/main">
+  <p:cSld>
+    <p:spTree>
+      <p:nvGrpSpPr>
+        <p:cNvPr id="1" name=""/>
+        <p:cNvGrpSpPr/>
+        <p:nvPr/>
+      </p:nvGrpSpPr>
+      <p:grpSpPr>
+        <a:xfrm>
+          <a:off x="0" y="0"/>
+          <a:ext cx="0" cy="0"/>
+          <a:chOff x="0" y="0"/>
+          <a:chExt cx="0" cy="0"/>
+        </a:xfrm>
+      </p:grpSpPr>
+      <p:sp>
+        <p:nvSpPr>
+          <p:cNvPr id="2" name="幻灯片图像占位符 1"/>
+          <p:cNvSpPr>
+            <a:spLocks noGrp="1" noRot="1" noChangeAspect="1"/>
+          </p:cNvSpPr>
+          <p:nvPr>
+            <p:ph type="sldImg"/>
+          </p:nvPr>
+        </p:nvSpPr>
+        <p:spPr/>
+      </p:sp>
+      <p:sp>
+        <p:nvSpPr>
+          <p:cNvPr id="3" name="备注占位符 2"/>
+          <p:cNvSpPr>
+            <a:spLocks noGrp="1"/>
+          </p:cNvSpPr>
+          <p:nvPr>
+            <p:ph type="body" idx="1"/>
+          </p:nvPr>
+        </p:nvSpPr>
+        <p:spPr/>
+        <p:txBody>
+          <a:bodyPr/>
+          <a:lstStyle/>
+          <a:p>
+            <a:endParaRPr lang="zh-CN" altLang="en-US" dirty="0"/>
+          </a:p>
+        </p:txBody>
+      </p:sp>
+      <p:sp>
+        <p:nvSpPr>
+          <p:cNvPr id="4" name="灯片编号占位符 3"/>
+          <p:cNvSpPr>
+            <a:spLocks noGrp="1"/>
+          </p:cNvSpPr>
+          <p:nvPr>
+            <p:ph type="sldNum" sz="quarter" idx="5"/>
+          </p:nvPr>
+        </p:nvSpPr>
+        <p:spPr/>
+        <p:txBody>
+          <a:bodyPr/>
+          <a:lstStyle/>
+          <a:p>
+            <a:fld id="{DF1895BC-06EC-475A-97CA-BF53472F2E03}" type="slidenum">
+              <a:rPr lang="de-DE" smtClean="0"/>
+              <a:pPr/>
+              <a:t>23</a:t>
+            </a:fld>
+            <a:endParaRPr lang="de-DE" dirty="0"/>
+          </a:p>
+        </p:txBody>
+      </p:sp>
+    </p:spTree>
+    <p:extLst>
+      <p:ext uri="{BB962C8B-B14F-4D97-AF65-F5344CB8AC3E}">
+        <p14:creationId xmlns:p14="http://schemas.microsoft.com/office/powerpoint/2010/main" val="173773317"/>
+      </p:ext>
+    </p:extLst>
+  </p:cSld>
+  <p:clrMapOvr>
+    <a:masterClrMapping/>
+  </p:clrMapOvr>
+</p:notes>
+</file>
+
+<file path=ppt/notesSlides/notesSlide24.xml><?xml version="1.0" encoding="utf-8"?>
+<p:notes xmlns:a="http://schemas.openxmlformats.org/drawingml/2006/main" xmlns:r="http://schemas.openxmlformats.org/officeDocument/2006/relationships" xmlns:p="http://schemas.openxmlformats.org/presentationml/2006/main">
+  <p:cSld>
+    <p:spTree>
+      <p:nvGrpSpPr>
+        <p:cNvPr id="1" name=""/>
+        <p:cNvGrpSpPr/>
+        <p:nvPr/>
+      </p:nvGrpSpPr>
+      <p:grpSpPr>
+        <a:xfrm>
+          <a:off x="0" y="0"/>
+          <a:ext cx="0" cy="0"/>
+          <a:chOff x="0" y="0"/>
+          <a:chExt cx="0" cy="0"/>
+        </a:xfrm>
+      </p:grpSpPr>
+      <p:sp>
+        <p:nvSpPr>
+          <p:cNvPr id="2" name="幻灯片图像占位符 1"/>
+          <p:cNvSpPr>
+            <a:spLocks noGrp="1" noRot="1" noChangeAspect="1"/>
+          </p:cNvSpPr>
+          <p:nvPr>
+            <p:ph type="sldImg"/>
+          </p:nvPr>
+        </p:nvSpPr>
+        <p:spPr/>
+      </p:sp>
+      <p:sp>
+        <p:nvSpPr>
+          <p:cNvPr id="3" name="备注占位符 2"/>
+          <p:cNvSpPr>
+            <a:spLocks noGrp="1"/>
+          </p:cNvSpPr>
+          <p:nvPr>
+            <p:ph type="body" idx="1"/>
+          </p:nvPr>
+        </p:nvSpPr>
+        <p:spPr/>
+        <p:txBody>
+          <a:bodyPr/>
+          <a:lstStyle/>
+          <a:p>
+            <a:endParaRPr lang="zh-CN" altLang="en-US" dirty="0"/>
+          </a:p>
+        </p:txBody>
+      </p:sp>
+      <p:sp>
+        <p:nvSpPr>
+          <p:cNvPr id="4" name="灯片编号占位符 3"/>
+          <p:cNvSpPr>
+            <a:spLocks noGrp="1"/>
+          </p:cNvSpPr>
+          <p:nvPr>
+            <p:ph type="sldNum" sz="quarter" idx="5"/>
+          </p:nvPr>
+        </p:nvSpPr>
+        <p:spPr/>
+        <p:txBody>
+          <a:bodyPr/>
+          <a:lstStyle/>
+          <a:p>
+            <a:fld id="{DF1895BC-06EC-475A-97CA-BF53472F2E03}" type="slidenum">
+              <a:rPr lang="de-DE" smtClean="0"/>
+              <a:pPr/>
+              <a:t>28</a:t>
+            </a:fld>
+            <a:endParaRPr lang="de-DE" dirty="0"/>
+          </a:p>
+        </p:txBody>
+      </p:sp>
+    </p:spTree>
+    <p:extLst>
+      <p:ext uri="{BB962C8B-B14F-4D97-AF65-F5344CB8AC3E}">
+        <p14:creationId xmlns:p14="http://schemas.microsoft.com/office/powerpoint/2010/main" val="69174315"/>
+      </p:ext>
+    </p:extLst>
+  </p:cSld>
+  <p:clrMapOvr>
+    <a:masterClrMapping/>
+  </p:clrMapOvr>
+</p:notes>
+</file>
+
+<file path=ppt/notesSlides/notesSlide25.xml><?xml version="1.0" encoding="utf-8"?>
+<p:notes xmlns:a="http://schemas.openxmlformats.org/drawingml/2006/main" xmlns:r="http://schemas.openxmlformats.org/officeDocument/2006/relationships" xmlns:p="http://schemas.openxmlformats.org/presentationml/2006/main">
+  <p:cSld>
+    <p:spTree>
+      <p:nvGrpSpPr>
+        <p:cNvPr id="1" name=""/>
+        <p:cNvGrpSpPr/>
+        <p:nvPr/>
+      </p:nvGrpSpPr>
+      <p:grpSpPr>
+        <a:xfrm>
+          <a:off x="0" y="0"/>
+          <a:ext cx="0" cy="0"/>
+          <a:chOff x="0" y="0"/>
+          <a:chExt cx="0" cy="0"/>
+        </a:xfrm>
+      </p:grpSpPr>
+      <p:sp>
+        <p:nvSpPr>
+          <p:cNvPr id="2" name="幻灯片图像占位符 1"/>
+          <p:cNvSpPr>
+            <a:spLocks noGrp="1" noRot="1" noChangeAspect="1"/>
+          </p:cNvSpPr>
+          <p:nvPr>
+            <p:ph type="sldImg"/>
+          </p:nvPr>
+        </p:nvSpPr>
+        <p:spPr/>
         <p:txBody>
           <a:bodyPr/>
           <a:lstStyle/>
@@ -2495,6 +3003,34 @@
           <a:bodyPr/>
           <a:lstStyle/>
           <a:p>
+            <a:r>
+              <a:rPr lang="en-US" altLang="zh-CN" dirty="0"/>
+              <a:t>Alright, we’ve finally gotten through the turbofan network.</a:t>
+            </a:r>
+            <a:r>
+              <a:rPr lang="en-US" altLang="zh-CN" sz="1200" b="0" i="0" kern="1200" dirty="0">
+                <a:solidFill>
+                  <a:schemeClr val="tx1"/>
+                </a:solidFill>
+                <a:effectLst/>
+                <a:latin typeface="Arial" pitchFamily="34" charset="0"/>
+                <a:ea typeface="+mn-ea"/>
+                <a:cs typeface="+mn-cs"/>
+              </a:rPr>
+              <a:t> We’ve now finished building all the core parts of the aircraft. Still, we’ve got a few small loose ends to tie up. </a:t>
+            </a:r>
+            <a:r>
+              <a:rPr lang="en-US" altLang="zh-CN" dirty="0"/>
+              <a:t>We’ll use the </a:t>
+            </a:r>
+            <a:r>
+              <a:rPr lang="en-US" altLang="zh-CN" dirty="0" err="1"/>
+              <a:t>simple_sizing</a:t>
+            </a:r>
+            <a:r>
+              <a:rPr lang="en-US" altLang="zh-CN" dirty="0"/>
+              <a:t> function to add those aircraft parameters which are secondary but also critical for calculation.</a:t>
+            </a:r>
             <a:endParaRPr lang="zh-CN" altLang="en-US" dirty="0"/>
           </a:p>
         </p:txBody>
@@ -2536,7 +3072,453 @@
 </p:notes>
 </file>
 
-<file path=ppt/notesSlides/notesSlide21.xml><?xml version="1.0" encoding="utf-8"?>
+<file path=ppt/notesSlides/notesSlide26.xml><?xml version="1.0" encoding="utf-8"?>
+<p:notes xmlns:a="http://schemas.openxmlformats.org/drawingml/2006/main" xmlns:r="http://schemas.openxmlformats.org/officeDocument/2006/relationships" xmlns:p="http://schemas.openxmlformats.org/presentationml/2006/main">
+  <p:cSld>
+    <p:spTree>
+      <p:nvGrpSpPr>
+        <p:cNvPr id="1" name=""/>
+        <p:cNvGrpSpPr/>
+        <p:nvPr/>
+      </p:nvGrpSpPr>
+      <p:grpSpPr>
+        <a:xfrm>
+          <a:off x="0" y="0"/>
+          <a:ext cx="0" cy="0"/>
+          <a:chOff x="0" y="0"/>
+          <a:chExt cx="0" cy="0"/>
+        </a:xfrm>
+      </p:grpSpPr>
+      <p:sp>
+        <p:nvSpPr>
+          <p:cNvPr id="2" name="幻灯片图像占位符 1"/>
+          <p:cNvSpPr>
+            <a:spLocks noGrp="1" noRot="1" noChangeAspect="1"/>
+          </p:cNvSpPr>
+          <p:nvPr>
+            <p:ph type="sldImg"/>
+          </p:nvPr>
+        </p:nvSpPr>
+        <p:spPr/>
+      </p:sp>
+      <p:sp>
+        <p:nvSpPr>
+          <p:cNvPr id="3" name="备注占位符 2"/>
+          <p:cNvSpPr>
+            <a:spLocks noGrp="1"/>
+          </p:cNvSpPr>
+          <p:nvPr>
+            <p:ph type="body" idx="1"/>
+          </p:nvPr>
+        </p:nvSpPr>
+        <p:spPr/>
+        <p:txBody>
+          <a:bodyPr/>
+          <a:lstStyle/>
+          <a:p>
+            <a:r>
+              <a:rPr lang="en-US" altLang="zh-CN" sz="1200" b="0" i="0" kern="1200" dirty="0">
+                <a:solidFill>
+                  <a:schemeClr val="tx1"/>
+                </a:solidFill>
+                <a:effectLst/>
+                <a:latin typeface="Arial" pitchFamily="34" charset="0"/>
+                <a:ea typeface="+mn-ea"/>
+                <a:cs typeface="+mn-cs"/>
+              </a:rPr>
+              <a:t>Last up is plotting the results. SUAVE has some built-in plotting functions, and I **completely copied this part from the Boeing 737 test case**. You can also create your own plotting functions to make plot you need. And that’s it — we’ve finished writing our entire simple case! Now just run it!</a:t>
+            </a:r>
+            <a:endParaRPr lang="zh-CN" altLang="en-US" dirty="0"/>
+          </a:p>
+        </p:txBody>
+      </p:sp>
+      <p:sp>
+        <p:nvSpPr>
+          <p:cNvPr id="4" name="灯片编号占位符 3"/>
+          <p:cNvSpPr>
+            <a:spLocks noGrp="1"/>
+          </p:cNvSpPr>
+          <p:nvPr>
+            <p:ph type="sldNum" sz="quarter" idx="5"/>
+          </p:nvPr>
+        </p:nvSpPr>
+        <p:spPr/>
+        <p:txBody>
+          <a:bodyPr/>
+          <a:lstStyle/>
+          <a:p>
+            <a:fld id="{DF1895BC-06EC-475A-97CA-BF53472F2E03}" type="slidenum">
+              <a:rPr lang="de-DE" smtClean="0"/>
+              <a:pPr/>
+              <a:t>30</a:t>
+            </a:fld>
+            <a:endParaRPr lang="de-DE" dirty="0"/>
+          </a:p>
+        </p:txBody>
+      </p:sp>
+    </p:spTree>
+    <p:extLst>
+      <p:ext uri="{BB962C8B-B14F-4D97-AF65-F5344CB8AC3E}">
+        <p14:creationId xmlns:p14="http://schemas.microsoft.com/office/powerpoint/2010/main" val="2149341445"/>
+      </p:ext>
+    </p:extLst>
+  </p:cSld>
+  <p:clrMapOvr>
+    <a:masterClrMapping/>
+  </p:clrMapOvr>
+</p:notes>
+</file>
+
+<file path=ppt/notesSlides/notesSlide27.xml><?xml version="1.0" encoding="utf-8"?>
+<p:notes xmlns:a="http://schemas.openxmlformats.org/drawingml/2006/main" xmlns:r="http://schemas.openxmlformats.org/officeDocument/2006/relationships" xmlns:p="http://schemas.openxmlformats.org/presentationml/2006/main">
+  <p:cSld>
+    <p:spTree>
+      <p:nvGrpSpPr>
+        <p:cNvPr id="1" name=""/>
+        <p:cNvGrpSpPr/>
+        <p:nvPr/>
+      </p:nvGrpSpPr>
+      <p:grpSpPr>
+        <a:xfrm>
+          <a:off x="0" y="0"/>
+          <a:ext cx="0" cy="0"/>
+          <a:chOff x="0" y="0"/>
+          <a:chExt cx="0" cy="0"/>
+        </a:xfrm>
+      </p:grpSpPr>
+      <p:sp>
+        <p:nvSpPr>
+          <p:cNvPr id="2" name="幻灯片图像占位符 1"/>
+          <p:cNvSpPr>
+            <a:spLocks noGrp="1" noRot="1" noChangeAspect="1"/>
+          </p:cNvSpPr>
+          <p:nvPr>
+            <p:ph type="sldImg"/>
+          </p:nvPr>
+        </p:nvSpPr>
+        <p:spPr/>
+      </p:sp>
+      <p:sp>
+        <p:nvSpPr>
+          <p:cNvPr id="3" name="备注占位符 2"/>
+          <p:cNvSpPr>
+            <a:spLocks noGrp="1"/>
+          </p:cNvSpPr>
+          <p:nvPr>
+            <p:ph type="body" idx="1"/>
+          </p:nvPr>
+        </p:nvSpPr>
+        <p:spPr/>
+        <p:txBody>
+          <a:bodyPr/>
+          <a:lstStyle/>
+          <a:p>
+            <a:r>
+              <a:rPr lang="en-US" altLang="zh-CN" sz="1200" b="0" i="0" kern="1200" dirty="0">
+                <a:solidFill>
+                  <a:schemeClr val="tx1"/>
+                </a:solidFill>
+                <a:effectLst/>
+                <a:latin typeface="Arial" pitchFamily="34" charset="0"/>
+                <a:ea typeface="+mn-ea"/>
+                <a:cs typeface="+mn-cs"/>
+              </a:rPr>
+              <a:t>Congratulations! By now, we’ve basically figure out how SUAVE works, and we’ve built a simple case of our very own. Do anyone remember earlier when we were setting up the fuselage? I mentioned those geometry parameters in the code are pretty hard to picture in our mind. Now, we’re </a:t>
+            </a:r>
+            <a:r>
+              <a:rPr lang="en-US" altLang="zh-CN" sz="1200" b="0" i="0" kern="1200" dirty="0" err="1">
+                <a:solidFill>
+                  <a:schemeClr val="tx1"/>
+                </a:solidFill>
+                <a:effectLst/>
+                <a:latin typeface="Arial" pitchFamily="34" charset="0"/>
+                <a:ea typeface="+mn-ea"/>
+                <a:cs typeface="+mn-cs"/>
+              </a:rPr>
+              <a:t>gonna</a:t>
+            </a:r>
+            <a:r>
+              <a:rPr lang="en-US" altLang="zh-CN" sz="1200" b="0" i="0" kern="1200" dirty="0">
+                <a:solidFill>
+                  <a:schemeClr val="tx1"/>
+                </a:solidFill>
+                <a:effectLst/>
+                <a:latin typeface="Arial" pitchFamily="34" charset="0"/>
+                <a:ea typeface="+mn-ea"/>
+                <a:cs typeface="+mn-cs"/>
+              </a:rPr>
+              <a:t> import the </a:t>
+            </a:r>
+            <a:r>
+              <a:rPr lang="en-US" altLang="zh-CN" sz="1200" b="0" i="0" kern="1200" dirty="0" err="1">
+                <a:solidFill>
+                  <a:schemeClr val="tx1"/>
+                </a:solidFill>
+                <a:effectLst/>
+                <a:latin typeface="Arial" pitchFamily="34" charset="0"/>
+                <a:ea typeface="+mn-ea"/>
+                <a:cs typeface="+mn-cs"/>
+              </a:rPr>
+              <a:t>OpenVSP</a:t>
+            </a:r>
+            <a:r>
+              <a:rPr lang="en-US" altLang="zh-CN" sz="1200" b="0" i="0" kern="1200" dirty="0">
+                <a:solidFill>
+                  <a:schemeClr val="tx1"/>
+                </a:solidFill>
+                <a:effectLst/>
+                <a:latin typeface="Arial" pitchFamily="34" charset="0"/>
+                <a:ea typeface="+mn-ea"/>
+                <a:cs typeface="+mn-cs"/>
+              </a:rPr>
+              <a:t> interface, so we can actually take a look at our aircraft. There is a python folder under </a:t>
+            </a:r>
+            <a:r>
+              <a:rPr lang="en-US" altLang="zh-CN" sz="1200" b="0" i="0" kern="1200" dirty="0" err="1">
+                <a:solidFill>
+                  <a:schemeClr val="tx1"/>
+                </a:solidFill>
+                <a:effectLst/>
+                <a:latin typeface="Arial" pitchFamily="34" charset="0"/>
+                <a:ea typeface="+mn-ea"/>
+                <a:cs typeface="+mn-cs"/>
+              </a:rPr>
+              <a:t>openvsp</a:t>
+            </a:r>
+            <a:r>
+              <a:rPr lang="en-US" altLang="zh-CN" sz="1200" b="0" i="0" kern="1200" dirty="0">
+                <a:solidFill>
+                  <a:schemeClr val="tx1"/>
+                </a:solidFill>
+                <a:effectLst/>
+                <a:latin typeface="Arial" pitchFamily="34" charset="0"/>
+                <a:ea typeface="+mn-ea"/>
+                <a:cs typeface="+mn-cs"/>
+              </a:rPr>
+              <a:t> path, open the </a:t>
+            </a:r>
+            <a:r>
+              <a:rPr lang="en-US" altLang="zh-CN" sz="1200" b="0" i="0" kern="1200" dirty="0" err="1">
+                <a:solidFill>
+                  <a:schemeClr val="tx1"/>
+                </a:solidFill>
+                <a:effectLst/>
+                <a:latin typeface="Arial" pitchFamily="34" charset="0"/>
+                <a:ea typeface="+mn-ea"/>
+                <a:cs typeface="+mn-cs"/>
+              </a:rPr>
+              <a:t>cmd</a:t>
+            </a:r>
+            <a:r>
+              <a:rPr lang="en-US" altLang="zh-CN" sz="1200" b="0" i="0" kern="1200" dirty="0">
+                <a:solidFill>
+                  <a:schemeClr val="tx1"/>
+                </a:solidFill>
+                <a:effectLst/>
+                <a:latin typeface="Arial" pitchFamily="34" charset="0"/>
+                <a:ea typeface="+mn-ea"/>
+                <a:cs typeface="+mn-cs"/>
+              </a:rPr>
+              <a:t> terminal under the folder, and remember to activate your python environment for SUAVE in the </a:t>
+            </a:r>
+            <a:r>
+              <a:rPr lang="en-US" altLang="zh-CN" sz="1200" b="0" i="0" kern="1200" dirty="0" err="1">
+                <a:solidFill>
+                  <a:schemeClr val="tx1"/>
+                </a:solidFill>
+                <a:effectLst/>
+                <a:latin typeface="Arial" pitchFamily="34" charset="0"/>
+                <a:ea typeface="+mn-ea"/>
+                <a:cs typeface="+mn-cs"/>
+              </a:rPr>
+              <a:t>cmd</a:t>
+            </a:r>
+            <a:r>
+              <a:rPr lang="en-US" altLang="zh-CN" sz="1200" b="0" i="0" kern="1200" dirty="0">
+                <a:solidFill>
+                  <a:schemeClr val="tx1"/>
+                </a:solidFill>
+                <a:effectLst/>
+                <a:latin typeface="Arial" pitchFamily="34" charset="0"/>
+                <a:ea typeface="+mn-ea"/>
+                <a:cs typeface="+mn-cs"/>
+              </a:rPr>
+              <a:t>, then type pip install like I write in </a:t>
+            </a:r>
+            <a:r>
+              <a:rPr lang="en-US" altLang="zh-CN" sz="1200" b="0" i="0" kern="1200" dirty="0" err="1">
+                <a:solidFill>
+                  <a:schemeClr val="tx1"/>
+                </a:solidFill>
+                <a:effectLst/>
+                <a:latin typeface="Arial" pitchFamily="34" charset="0"/>
+                <a:ea typeface="+mn-ea"/>
+                <a:cs typeface="+mn-cs"/>
+              </a:rPr>
+              <a:t>powerpoint</a:t>
+            </a:r>
+            <a:r>
+              <a:rPr lang="en-US" altLang="zh-CN" sz="1200" b="0" i="0" kern="1200" dirty="0">
+                <a:solidFill>
+                  <a:schemeClr val="tx1"/>
+                </a:solidFill>
+                <a:effectLst/>
+                <a:latin typeface="Arial" pitchFamily="34" charset="0"/>
+                <a:ea typeface="+mn-ea"/>
+                <a:cs typeface="+mn-cs"/>
+              </a:rPr>
+              <a:t>. And then back to our code, import the open </a:t>
+            </a:r>
+            <a:r>
+              <a:rPr lang="en-US" altLang="zh-CN" sz="1200" b="0" i="0" kern="1200" dirty="0" err="1">
+                <a:solidFill>
+                  <a:schemeClr val="tx1"/>
+                </a:solidFill>
+                <a:effectLst/>
+                <a:latin typeface="Arial" pitchFamily="34" charset="0"/>
+                <a:ea typeface="+mn-ea"/>
+                <a:cs typeface="+mn-cs"/>
+              </a:rPr>
+              <a:t>vsp</a:t>
+            </a:r>
+            <a:r>
+              <a:rPr lang="en-US" altLang="zh-CN" sz="1200" b="0" i="0" kern="1200" dirty="0">
+                <a:solidFill>
+                  <a:schemeClr val="tx1"/>
+                </a:solidFill>
+                <a:effectLst/>
+                <a:latin typeface="Arial" pitchFamily="34" charset="0"/>
+                <a:ea typeface="+mn-ea"/>
+                <a:cs typeface="+mn-cs"/>
+              </a:rPr>
+              <a:t> at the first of code, and add write(vehicle, ‘base’) in main function, now run the code again, a </a:t>
+            </a:r>
+            <a:r>
+              <a:rPr lang="en-US" altLang="zh-CN" sz="1200" b="0" i="0" kern="1200" dirty="0" err="1">
+                <a:solidFill>
+                  <a:schemeClr val="tx1"/>
+                </a:solidFill>
+                <a:effectLst/>
+                <a:latin typeface="Arial" pitchFamily="34" charset="0"/>
+                <a:ea typeface="+mn-ea"/>
+                <a:cs typeface="+mn-cs"/>
+              </a:rPr>
+              <a:t>vsp</a:t>
+            </a:r>
+            <a:r>
+              <a:rPr lang="en-US" altLang="zh-CN" sz="1200" b="0" i="0" kern="1200" dirty="0">
+                <a:solidFill>
+                  <a:schemeClr val="tx1"/>
+                </a:solidFill>
+                <a:effectLst/>
+                <a:latin typeface="Arial" pitchFamily="34" charset="0"/>
+                <a:ea typeface="+mn-ea"/>
+                <a:cs typeface="+mn-cs"/>
+              </a:rPr>
+              <a:t> file will be generated under your code directory. You can open the </a:t>
+            </a:r>
+            <a:r>
+              <a:rPr lang="en-US" altLang="zh-CN" sz="1200" b="0" i="0" kern="1200" dirty="0" err="1">
+                <a:solidFill>
+                  <a:schemeClr val="tx1"/>
+                </a:solidFill>
+                <a:effectLst/>
+                <a:latin typeface="Arial" pitchFamily="34" charset="0"/>
+                <a:ea typeface="+mn-ea"/>
+                <a:cs typeface="+mn-cs"/>
+              </a:rPr>
+              <a:t>vsp</a:t>
+            </a:r>
+            <a:r>
+              <a:rPr lang="en-US" altLang="zh-CN" sz="1200" b="0" i="0" kern="1200" dirty="0">
+                <a:solidFill>
+                  <a:schemeClr val="tx1"/>
+                </a:solidFill>
+                <a:effectLst/>
+                <a:latin typeface="Arial" pitchFamily="34" charset="0"/>
+                <a:ea typeface="+mn-ea"/>
+                <a:cs typeface="+mn-cs"/>
+              </a:rPr>
+              <a:t> file in </a:t>
+            </a:r>
+            <a:r>
+              <a:rPr lang="en-US" altLang="zh-CN" sz="1200" b="0" i="0" kern="1200" dirty="0" err="1">
+                <a:solidFill>
+                  <a:schemeClr val="tx1"/>
+                </a:solidFill>
+                <a:effectLst/>
+                <a:latin typeface="Arial" pitchFamily="34" charset="0"/>
+                <a:ea typeface="+mn-ea"/>
+                <a:cs typeface="+mn-cs"/>
+              </a:rPr>
+              <a:t>openvsp</a:t>
+            </a:r>
+            <a:r>
+              <a:rPr lang="en-US" altLang="zh-CN" sz="1200" b="0" i="0" kern="1200" dirty="0">
+                <a:solidFill>
+                  <a:schemeClr val="tx1"/>
+                </a:solidFill>
+                <a:effectLst/>
+                <a:latin typeface="Arial" pitchFamily="34" charset="0"/>
+                <a:ea typeface="+mn-ea"/>
+                <a:cs typeface="+mn-cs"/>
+              </a:rPr>
+              <a:t> to check whether our model is correct and reasonable, and get a clear 3D view of </a:t>
+            </a:r>
+            <a:r>
+              <a:rPr lang="en-US" altLang="zh-CN" sz="1200" b="0" i="0" kern="1200">
+                <a:solidFill>
+                  <a:schemeClr val="tx1"/>
+                </a:solidFill>
+                <a:effectLst/>
+                <a:latin typeface="Arial" pitchFamily="34" charset="0"/>
+                <a:ea typeface="+mn-ea"/>
+                <a:cs typeface="+mn-cs"/>
+              </a:rPr>
+              <a:t>our aircraft.</a:t>
+            </a:r>
+            <a:endParaRPr lang="zh-CN" altLang="en-US" dirty="0"/>
+          </a:p>
+        </p:txBody>
+      </p:sp>
+      <p:sp>
+        <p:nvSpPr>
+          <p:cNvPr id="4" name="灯片编号占位符 3"/>
+          <p:cNvSpPr>
+            <a:spLocks noGrp="1"/>
+          </p:cNvSpPr>
+          <p:nvPr>
+            <p:ph type="sldNum" sz="quarter" idx="5"/>
+          </p:nvPr>
+        </p:nvSpPr>
+        <p:spPr/>
+        <p:txBody>
+          <a:bodyPr/>
+          <a:lstStyle/>
+          <a:p>
+            <a:fld id="{DF1895BC-06EC-475A-97CA-BF53472F2E03}" type="slidenum">
+              <a:rPr lang="de-DE" smtClean="0"/>
+              <a:pPr/>
+              <a:t>31</a:t>
+            </a:fld>
+            <a:endParaRPr lang="de-DE" dirty="0"/>
+          </a:p>
+        </p:txBody>
+      </p:sp>
+    </p:spTree>
+    <p:extLst>
+      <p:ext uri="{BB962C8B-B14F-4D97-AF65-F5344CB8AC3E}">
+        <p14:creationId xmlns:p14="http://schemas.microsoft.com/office/powerpoint/2010/main" val="698508626"/>
+      </p:ext>
+    </p:extLst>
+  </p:cSld>
+  <p:clrMapOvr>
+    <a:masterClrMapping/>
+  </p:clrMapOvr>
+</p:notes>
+</file>
+
+<file path=ppt/notesSlides/notesSlide28.xml><?xml version="1.0" encoding="utf-8"?>
 <p:notes xmlns:a="http://schemas.openxmlformats.org/drawingml/2006/main" xmlns:r="http://schemas.openxmlformats.org/officeDocument/2006/relationships" xmlns:p="http://schemas.openxmlformats.org/presentationml/2006/main">
   <p:cSld>
     <p:spTree>
@@ -32830,7 +33812,7 @@
           <p:nvPr/>
         </p:nvPicPr>
         <p:blipFill>
-          <a:blip r:embed="rId2"/>
+          <a:blip r:embed="rId3"/>
           <a:stretch>
             <a:fillRect/>
           </a:stretch>
@@ -33132,7 +34114,7 @@
           <p:nvPr/>
         </p:nvPicPr>
         <p:blipFill>
-          <a:blip r:embed="rId2"/>
+          <a:blip r:embed="rId3"/>
           <a:stretch>
             <a:fillRect/>
           </a:stretch>
@@ -33836,7 +34818,7 @@
           <p:nvPr/>
         </p:nvPicPr>
         <p:blipFill>
-          <a:blip r:embed="rId2"/>
+          <a:blip r:embed="rId3"/>
           <a:stretch>
             <a:fillRect/>
           </a:stretch>
@@ -34587,7 +35569,7 @@
           <p:nvPr/>
         </p:nvPicPr>
         <p:blipFill>
-          <a:blip r:embed="rId2"/>
+          <a:blip r:embed="rId3"/>
           <a:stretch>
             <a:fillRect/>
           </a:stretch>
@@ -34982,25 +35964,65 @@
                 <a:latin typeface="微软雅黑" panose="020B0503020204020204" pitchFamily="34" charset="-122"/>
                 <a:ea typeface="微软雅黑" panose="020B0503020204020204" pitchFamily="34" charset="-122"/>
               </a:rPr>
-              <a:t>  Fan  </a:t>
-            </a:r>
-            <a:r>
-              <a:rPr lang="zh-CN" altLang="en-US" sz="2000" dirty="0">
-                <a:solidFill>
-                  <a:srgbClr val="002060"/>
-                </a:solidFill>
-              </a:rPr>
-              <a:t>➡️</a:t>
+              <a:t>  </a:t>
             </a:r>
             <a:r>
               <a:rPr lang="en-US" altLang="zh-CN" sz="2000" b="1" dirty="0">
                 <a:solidFill>
-                  <a:srgbClr val="002060"/>
+                  <a:srgbClr val="C00000"/>
                 </a:solidFill>
                 <a:latin typeface="微软雅黑" panose="020B0503020204020204" pitchFamily="34" charset="-122"/>
                 <a:ea typeface="微软雅黑" panose="020B0503020204020204" pitchFamily="34" charset="-122"/>
               </a:rPr>
-              <a:t>  Low Pressure Compressor  </a:t>
+              <a:t>Fan</a:t>
+            </a:r>
+            <a:r>
+              <a:rPr lang="en-US" altLang="zh-CN" sz="2000" b="1" dirty="0">
+                <a:solidFill>
+                  <a:srgbClr val="002060"/>
+                </a:solidFill>
+                <a:latin typeface="微软雅黑" panose="020B0503020204020204" pitchFamily="34" charset="-122"/>
+                <a:ea typeface="微软雅黑" panose="020B0503020204020204" pitchFamily="34" charset="-122"/>
+              </a:rPr>
+              <a:t>  </a:t>
+            </a:r>
+            <a:r>
+              <a:rPr lang="zh-CN" altLang="en-US" sz="2000" dirty="0">
+                <a:solidFill>
+                  <a:srgbClr val="002060"/>
+                </a:solidFill>
+              </a:rPr>
+              <a:t>➡️</a:t>
+            </a:r>
+            <a:r>
+              <a:rPr lang="en-US" altLang="zh-CN" sz="2000" b="1" dirty="0">
+                <a:solidFill>
+                  <a:srgbClr val="002060"/>
+                </a:solidFill>
+                <a:latin typeface="微软雅黑" panose="020B0503020204020204" pitchFamily="34" charset="-122"/>
+                <a:ea typeface="微软雅黑" panose="020B0503020204020204" pitchFamily="34" charset="-122"/>
+              </a:rPr>
+              <a:t>  </a:t>
+            </a:r>
+            <a:r>
+              <a:rPr lang="en-US" altLang="zh-CN" sz="2000" b="1" dirty="0">
+                <a:solidFill>
+                  <a:srgbClr val="C00000"/>
+                </a:solidFill>
+                <a:latin typeface="微软雅黑" panose="020B0503020204020204" pitchFamily="34" charset="-122"/>
+                <a:ea typeface="微软雅黑" panose="020B0503020204020204" pitchFamily="34" charset="-122"/>
+              </a:rPr>
+              <a:t>Low Pressure Compressor</a:t>
+            </a:r>
+            <a:r>
+              <a:rPr lang="en-US" altLang="zh-CN" sz="2000" b="1" dirty="0">
+                <a:solidFill>
+                  <a:srgbClr val="002060"/>
+                </a:solidFill>
+                <a:latin typeface="微软雅黑" panose="020B0503020204020204" pitchFamily="34" charset="-122"/>
+                <a:ea typeface="微软雅黑" panose="020B0503020204020204" pitchFamily="34" charset="-122"/>
+              </a:rPr>
+              <a:t>  </a:t>
             </a:r>
             <a:r>
               <a:rPr lang="zh-CN" altLang="en-US" sz="2000" dirty="0">
@@ -38281,7 +39303,7 @@
           <p:nvPr/>
         </p:nvPicPr>
         <p:blipFill>
-          <a:blip r:embed="rId2"/>
+          <a:blip r:embed="rId3"/>
           <a:stretch>
             <a:fillRect/>
           </a:stretch>
@@ -40348,7 +41370,7 @@
           <p:nvPr/>
         </p:nvPicPr>
         <p:blipFill>
-          <a:blip r:embed="rId2"/>
+          <a:blip r:embed="rId3"/>
           <a:stretch>
             <a:fillRect/>
           </a:stretch>
@@ -41221,7 +42243,7 @@
           <p:nvPr/>
         </p:nvPicPr>
         <p:blipFill>
-          <a:blip r:embed="rId2"/>
+          <a:blip r:embed="rId3"/>
           <a:stretch>
             <a:fillRect/>
           </a:stretch>

--- a/Design Conceptual Aircraft via SUAVE.pptx
+++ b/Design Conceptual Aircraft via SUAVE.pptx
@@ -3463,19 +3463,7 @@
                 <a:ea typeface="+mn-ea"/>
                 <a:cs typeface="+mn-cs"/>
               </a:rPr>
-              <a:t> to check whether our model is correct and reasonable, and get a clear 3D view of </a:t>
-            </a:r>
-            <a:r>
-              <a:rPr lang="en-US" altLang="zh-CN" sz="1200" b="0" i="0" kern="1200">
-                <a:solidFill>
-                  <a:schemeClr val="tx1"/>
-                </a:solidFill>
-                <a:effectLst/>
-                <a:latin typeface="Arial" pitchFamily="34" charset="0"/>
-                <a:ea typeface="+mn-ea"/>
-                <a:cs typeface="+mn-cs"/>
-              </a:rPr>
-              <a:t>our aircraft.</a:t>
+              <a:t> to check whether our model is correct and reasonable, and get a clear 3D view of our aircraft.</a:t>
             </a:r>
             <a:endParaRPr lang="zh-CN" altLang="en-US" dirty="0"/>
           </a:p>
@@ -3523,13 +3511,7 @@
   <p:cSld>
     <p:spTree>
       <p:nvGrpSpPr>
-        <p:cNvPr id="1" name="">
-          <a:extLst>
-            <a:ext uri="{FF2B5EF4-FFF2-40B4-BE49-F238E27FC236}">
-              <a16:creationId xmlns:a16="http://schemas.microsoft.com/office/drawing/2014/main" id="{8D36FB09-97AA-7E29-A45A-775B0F9F908E}"/>
-            </a:ext>
-          </a:extLst>
-        </p:cNvPr>
+        <p:cNvPr id="1" name=""/>
         <p:cNvGrpSpPr/>
         <p:nvPr/>
       </p:nvGrpSpPr>
@@ -3543,13 +3525,7 @@
       </p:grpSpPr>
       <p:sp>
         <p:nvSpPr>
-          <p:cNvPr id="2" name="幻灯片图像占位符 1">
-            <a:extLst>
-              <a:ext uri="{FF2B5EF4-FFF2-40B4-BE49-F238E27FC236}">
-                <a16:creationId xmlns:a16="http://schemas.microsoft.com/office/drawing/2014/main" id="{C080F85E-744A-3B8D-8811-4AD5135D7910}"/>
-              </a:ext>
-            </a:extLst>
-          </p:cNvPr>
+          <p:cNvPr id="2" name="幻灯片图像占位符 1"/>
           <p:cNvSpPr>
             <a:spLocks noGrp="1" noRot="1" noChangeAspect="1"/>
           </p:cNvSpPr>
@@ -3557,29 +3533,11 @@
             <p:ph type="sldImg"/>
           </p:nvPr>
         </p:nvSpPr>
-        <p:spPr>
-          <a:xfrm>
-            <a:off x="90488" y="744538"/>
-            <a:ext cx="6616700" cy="3722687"/>
-          </a:xfrm>
-        </p:spPr>
-        <p:txBody>
-          <a:bodyPr/>
-          <a:lstStyle/>
-          <a:p>
-            <a:endParaRPr lang="zh-CN" altLang="en-US"/>
-          </a:p>
-        </p:txBody>
+        <p:spPr/>
       </p:sp>
       <p:sp>
         <p:nvSpPr>
-          <p:cNvPr id="3" name="备注占位符 2">
-            <a:extLst>
-              <a:ext uri="{FF2B5EF4-FFF2-40B4-BE49-F238E27FC236}">
-                <a16:creationId xmlns:a16="http://schemas.microsoft.com/office/drawing/2014/main" id="{2494A4A5-24CF-5C2C-B6A3-5DE10E411098}"/>
-              </a:ext>
-            </a:extLst>
-          </p:cNvPr>
+          <p:cNvPr id="3" name="备注占位符 2"/>
           <p:cNvSpPr>
             <a:spLocks noGrp="1"/>
           </p:cNvSpPr>
@@ -3592,24 +3550,54 @@
           <a:bodyPr/>
           <a:lstStyle/>
           <a:p>
+            <a:r>
+              <a:rPr lang="en-GB" altLang="zh-CN" sz="1200" b="0" i="0" kern="1200" dirty="0">
+                <a:solidFill>
+                  <a:schemeClr val="tx1"/>
+                </a:solidFill>
+                <a:effectLst/>
+                <a:latin typeface="Arial" pitchFamily="34" charset="0"/>
+                <a:ea typeface="+mn-ea"/>
+                <a:cs typeface="+mn-cs"/>
+              </a:rPr>
+              <a:t>How our code turns into a real aircraft model?  On the slide, you can see part of the SUAVE source code. This section is for creating a wing component. It converts the parameters we set in our code into </a:t>
+            </a:r>
+            <a:r>
+              <a:rPr lang="en-GB" altLang="zh-CN" sz="1200" b="0" i="0" kern="1200" dirty="0" err="1">
+                <a:solidFill>
+                  <a:schemeClr val="tx1"/>
+                </a:solidFill>
+                <a:effectLst/>
+                <a:latin typeface="Arial" pitchFamily="34" charset="0"/>
+                <a:ea typeface="+mn-ea"/>
+                <a:cs typeface="+mn-cs"/>
+              </a:rPr>
+              <a:t>OpenVSP</a:t>
+            </a:r>
+            <a:r>
+              <a:rPr lang="en-GB" altLang="zh-CN" sz="1200" b="0" i="0" kern="1200" dirty="0">
+                <a:solidFill>
+                  <a:schemeClr val="tx1"/>
+                </a:solidFill>
+                <a:effectLst/>
+                <a:latin typeface="Arial" pitchFamily="34" charset="0"/>
+                <a:ea typeface="+mn-ea"/>
+                <a:cs typeface="+mn-cs"/>
+              </a:rPr>
+              <a:t> variables. Right here, it’s translating the XYZ coordinates, which means the location of each component.</a:t>
+            </a:r>
             <a:endParaRPr lang="zh-CN" altLang="en-US" dirty="0"/>
           </a:p>
         </p:txBody>
       </p:sp>
       <p:sp>
         <p:nvSpPr>
-          <p:cNvPr id="4" name="灯片编号占位符 3">
-            <a:extLst>
-              <a:ext uri="{FF2B5EF4-FFF2-40B4-BE49-F238E27FC236}">
-                <a16:creationId xmlns:a16="http://schemas.microsoft.com/office/drawing/2014/main" id="{8021127B-505F-3B1A-2AAA-65DF92B51E67}"/>
-              </a:ext>
-            </a:extLst>
-          </p:cNvPr>
+          <p:cNvPr id="4" name="灯片编号占位符 3"/>
           <p:cNvSpPr>
             <a:spLocks noGrp="1"/>
           </p:cNvSpPr>
           <p:nvPr>
-            <p:ph type="sldNum" sz="quarter" idx="10"/>
+            <p:ph type="sldNum" sz="quarter" idx="5"/>
           </p:nvPr>
         </p:nvSpPr>
         <p:spPr/>
@@ -3620,7 +3608,7 @@
             <a:fld id="{DF1895BC-06EC-475A-97CA-BF53472F2E03}" type="slidenum">
               <a:rPr lang="de-DE" smtClean="0"/>
               <a:pPr/>
-              <a:t>37</a:t>
+              <a:t>32</a:t>
             </a:fld>
             <a:endParaRPr lang="de-DE" dirty="0"/>
           </a:p>
@@ -3629,7 +3617,104 @@
     </p:spTree>
     <p:extLst>
       <p:ext uri="{BB962C8B-B14F-4D97-AF65-F5344CB8AC3E}">
-        <p14:creationId xmlns:p14="http://schemas.microsoft.com/office/powerpoint/2010/main" val="1157948595"/>
+        <p14:creationId xmlns:p14="http://schemas.microsoft.com/office/powerpoint/2010/main" val="2587374332"/>
+      </p:ext>
+    </p:extLst>
+  </p:cSld>
+  <p:clrMapOvr>
+    <a:masterClrMapping/>
+  </p:clrMapOvr>
+</p:notes>
+</file>
+
+<file path=ppt/notesSlides/notesSlide29.xml><?xml version="1.0" encoding="utf-8"?>
+<p:notes xmlns:a="http://schemas.openxmlformats.org/drawingml/2006/main" xmlns:r="http://schemas.openxmlformats.org/officeDocument/2006/relationships" xmlns:p="http://schemas.openxmlformats.org/presentationml/2006/main">
+  <p:cSld>
+    <p:spTree>
+      <p:nvGrpSpPr>
+        <p:cNvPr id="1" name=""/>
+        <p:cNvGrpSpPr/>
+        <p:nvPr/>
+      </p:nvGrpSpPr>
+      <p:grpSpPr>
+        <a:xfrm>
+          <a:off x="0" y="0"/>
+          <a:ext cx="0" cy="0"/>
+          <a:chOff x="0" y="0"/>
+          <a:chExt cx="0" cy="0"/>
+        </a:xfrm>
+      </p:grpSpPr>
+      <p:sp>
+        <p:nvSpPr>
+          <p:cNvPr id="2" name="幻灯片图像占位符 1"/>
+          <p:cNvSpPr>
+            <a:spLocks noGrp="1" noRot="1" noChangeAspect="1"/>
+          </p:cNvSpPr>
+          <p:nvPr>
+            <p:ph type="sldImg"/>
+          </p:nvPr>
+        </p:nvSpPr>
+        <p:spPr/>
+      </p:sp>
+      <p:sp>
+        <p:nvSpPr>
+          <p:cNvPr id="3" name="备注占位符 2"/>
+          <p:cNvSpPr>
+            <a:spLocks noGrp="1"/>
+          </p:cNvSpPr>
+          <p:nvPr>
+            <p:ph type="body" idx="1"/>
+          </p:nvPr>
+        </p:nvSpPr>
+        <p:spPr/>
+        <p:txBody>
+          <a:bodyPr/>
+          <a:lstStyle/>
+          <a:p>
+            <a:r>
+              <a:rPr lang="en-US" altLang="zh-CN" sz="1200" b="0" i="0" kern="1200" dirty="0">
+                <a:solidFill>
+                  <a:schemeClr val="tx1"/>
+                </a:solidFill>
+                <a:effectLst/>
+                <a:latin typeface="Arial" pitchFamily="34" charset="0"/>
+                <a:ea typeface="+mn-ea"/>
+                <a:cs typeface="+mn-cs"/>
+              </a:rPr>
+              <a:t>If you’re curious, you can open the VSP file with any text editor. You’ll see it’s structured in XML format like this. It stores every single aircraft parameter. You can easily find the values we defined in our code, but most of the content are auto-filled settings. As you might know, building a full geometry model requires way more data than basic overall analysis, and SUAVE will automatically fill in those extra details for us.</a:t>
+            </a:r>
+            <a:endParaRPr lang="zh-CN" altLang="en-US" dirty="0"/>
+          </a:p>
+        </p:txBody>
+      </p:sp>
+      <p:sp>
+        <p:nvSpPr>
+          <p:cNvPr id="4" name="灯片编号占位符 3"/>
+          <p:cNvSpPr>
+            <a:spLocks noGrp="1"/>
+          </p:cNvSpPr>
+          <p:nvPr>
+            <p:ph type="sldNum" sz="quarter" idx="5"/>
+          </p:nvPr>
+        </p:nvSpPr>
+        <p:spPr/>
+        <p:txBody>
+          <a:bodyPr/>
+          <a:lstStyle/>
+          <a:p>
+            <a:fld id="{DF1895BC-06EC-475A-97CA-BF53472F2E03}" type="slidenum">
+              <a:rPr lang="de-DE" smtClean="0"/>
+              <a:pPr/>
+              <a:t>33</a:t>
+            </a:fld>
+            <a:endParaRPr lang="de-DE" dirty="0"/>
+          </a:p>
+        </p:txBody>
+      </p:sp>
+    </p:spTree>
+    <p:extLst>
+      <p:ext uri="{BB962C8B-B14F-4D97-AF65-F5344CB8AC3E}">
+        <p14:creationId xmlns:p14="http://schemas.microsoft.com/office/powerpoint/2010/main" val="3531610641"/>
       </p:ext>
     </p:extLst>
   </p:cSld>
@@ -3742,6 +3827,127 @@
     <p:extLst>
       <p:ext uri="{BB962C8B-B14F-4D97-AF65-F5344CB8AC3E}">
         <p14:creationId xmlns:p14="http://schemas.microsoft.com/office/powerpoint/2010/main" val="3136964327"/>
+      </p:ext>
+    </p:extLst>
+  </p:cSld>
+  <p:clrMapOvr>
+    <a:masterClrMapping/>
+  </p:clrMapOvr>
+</p:notes>
+</file>
+
+<file path=ppt/notesSlides/notesSlide30.xml><?xml version="1.0" encoding="utf-8"?>
+<p:notes xmlns:a="http://schemas.openxmlformats.org/drawingml/2006/main" xmlns:r="http://schemas.openxmlformats.org/officeDocument/2006/relationships" xmlns:p="http://schemas.openxmlformats.org/presentationml/2006/main">
+  <p:cSld>
+    <p:spTree>
+      <p:nvGrpSpPr>
+        <p:cNvPr id="1" name="">
+          <a:extLst>
+            <a:ext uri="{FF2B5EF4-FFF2-40B4-BE49-F238E27FC236}">
+              <a16:creationId xmlns:a16="http://schemas.microsoft.com/office/drawing/2014/main" id="{8D36FB09-97AA-7E29-A45A-775B0F9F908E}"/>
+            </a:ext>
+          </a:extLst>
+        </p:cNvPr>
+        <p:cNvGrpSpPr/>
+        <p:nvPr/>
+      </p:nvGrpSpPr>
+      <p:grpSpPr>
+        <a:xfrm>
+          <a:off x="0" y="0"/>
+          <a:ext cx="0" cy="0"/>
+          <a:chOff x="0" y="0"/>
+          <a:chExt cx="0" cy="0"/>
+        </a:xfrm>
+      </p:grpSpPr>
+      <p:sp>
+        <p:nvSpPr>
+          <p:cNvPr id="2" name="幻灯片图像占位符 1">
+            <a:extLst>
+              <a:ext uri="{FF2B5EF4-FFF2-40B4-BE49-F238E27FC236}">
+                <a16:creationId xmlns:a16="http://schemas.microsoft.com/office/drawing/2014/main" id="{C080F85E-744A-3B8D-8811-4AD5135D7910}"/>
+              </a:ext>
+            </a:extLst>
+          </p:cNvPr>
+          <p:cNvSpPr>
+            <a:spLocks noGrp="1" noRot="1" noChangeAspect="1"/>
+          </p:cNvSpPr>
+          <p:nvPr>
+            <p:ph type="sldImg"/>
+          </p:nvPr>
+        </p:nvSpPr>
+        <p:spPr>
+          <a:xfrm>
+            <a:off x="90488" y="744538"/>
+            <a:ext cx="6616700" cy="3722687"/>
+          </a:xfrm>
+        </p:spPr>
+        <p:txBody>
+          <a:bodyPr/>
+          <a:lstStyle/>
+          <a:p>
+            <a:endParaRPr lang="zh-CN" altLang="en-US"/>
+          </a:p>
+        </p:txBody>
+      </p:sp>
+      <p:sp>
+        <p:nvSpPr>
+          <p:cNvPr id="3" name="备注占位符 2">
+            <a:extLst>
+              <a:ext uri="{FF2B5EF4-FFF2-40B4-BE49-F238E27FC236}">
+                <a16:creationId xmlns:a16="http://schemas.microsoft.com/office/drawing/2014/main" id="{2494A4A5-24CF-5C2C-B6A3-5DE10E411098}"/>
+              </a:ext>
+            </a:extLst>
+          </p:cNvPr>
+          <p:cNvSpPr>
+            <a:spLocks noGrp="1"/>
+          </p:cNvSpPr>
+          <p:nvPr>
+            <p:ph type="body" idx="1"/>
+          </p:nvPr>
+        </p:nvSpPr>
+        <p:spPr/>
+        <p:txBody>
+          <a:bodyPr/>
+          <a:lstStyle/>
+          <a:p>
+            <a:endParaRPr lang="zh-CN" altLang="en-US" dirty="0"/>
+          </a:p>
+        </p:txBody>
+      </p:sp>
+      <p:sp>
+        <p:nvSpPr>
+          <p:cNvPr id="4" name="灯片编号占位符 3">
+            <a:extLst>
+              <a:ext uri="{FF2B5EF4-FFF2-40B4-BE49-F238E27FC236}">
+                <a16:creationId xmlns:a16="http://schemas.microsoft.com/office/drawing/2014/main" id="{8021127B-505F-3B1A-2AAA-65DF92B51E67}"/>
+              </a:ext>
+            </a:extLst>
+          </p:cNvPr>
+          <p:cNvSpPr>
+            <a:spLocks noGrp="1"/>
+          </p:cNvSpPr>
+          <p:nvPr>
+            <p:ph type="sldNum" sz="quarter" idx="10"/>
+          </p:nvPr>
+        </p:nvSpPr>
+        <p:spPr/>
+        <p:txBody>
+          <a:bodyPr/>
+          <a:lstStyle/>
+          <a:p>
+            <a:fld id="{DF1895BC-06EC-475A-97CA-BF53472F2E03}" type="slidenum">
+              <a:rPr lang="de-DE" smtClean="0"/>
+              <a:pPr/>
+              <a:t>37</a:t>
+            </a:fld>
+            <a:endParaRPr lang="de-DE" dirty="0"/>
+          </a:p>
+        </p:txBody>
+      </p:sp>
+    </p:spTree>
+    <p:extLst>
+      <p:ext uri="{BB962C8B-B14F-4D97-AF65-F5344CB8AC3E}">
+        <p14:creationId xmlns:p14="http://schemas.microsoft.com/office/powerpoint/2010/main" val="1157948595"/>
       </p:ext>
     </p:extLst>
   </p:cSld>
@@ -42981,7 +43187,7 @@
           <p:nvPr/>
         </p:nvPicPr>
         <p:blipFill>
-          <a:blip r:embed="rId2"/>
+          <a:blip r:embed="rId3"/>
           <a:stretch>
             <a:fillRect/>
           </a:stretch>
